--- a/Methodology/Flowchart  Enso Bangladesh Teleconnection.pptx
+++ b/Methodology/Flowchart  Enso Bangladesh Teleconnection.pptx
@@ -5,9 +5,7 @@
     <p:sldMasterId id="2147483660" r:id="rId1"/>
   </p:sldMasterIdLst>
   <p:sldIdLst>
-    <p:sldId id="256" r:id="rId2"/>
-    <p:sldId id="257" r:id="rId3"/>
-    <p:sldId id="258" r:id="rId4"/>
+    <p:sldId id="258" r:id="rId2"/>
   </p:sldIdLst>
   <p:sldSz cx="9144000" cy="6858000" type="screen4x3"/>
   <p:notesSz cx="6858000" cy="9144000"/>
@@ -245,7 +243,7 @@
           <a:p>
             <a:fld id="{39951387-8933-43AC-9F1E-E95B326ABA00}" type="datetimeFigureOut">
               <a:rPr lang="en-US" smtClean="0"/>
-              <a:t>9/12/2026</a:t>
+              <a:t>9/21/2026</a:t>
             </a:fld>
             <a:endParaRPr lang="en-US"/>
           </a:p>
@@ -415,7 +413,7 @@
           <a:p>
             <a:fld id="{39951387-8933-43AC-9F1E-E95B326ABA00}" type="datetimeFigureOut">
               <a:rPr lang="en-US" smtClean="0"/>
-              <a:t>9/12/2026</a:t>
+              <a:t>9/21/2026</a:t>
             </a:fld>
             <a:endParaRPr lang="en-US"/>
           </a:p>
@@ -595,7 +593,7 @@
           <a:p>
             <a:fld id="{39951387-8933-43AC-9F1E-E95B326ABA00}" type="datetimeFigureOut">
               <a:rPr lang="en-US" smtClean="0"/>
-              <a:t>9/12/2026</a:t>
+              <a:t>9/21/2026</a:t>
             </a:fld>
             <a:endParaRPr lang="en-US"/>
           </a:p>
@@ -765,7 +763,7 @@
           <a:p>
             <a:fld id="{39951387-8933-43AC-9F1E-E95B326ABA00}" type="datetimeFigureOut">
               <a:rPr lang="en-US" smtClean="0"/>
-              <a:t>9/12/2026</a:t>
+              <a:t>9/21/2026</a:t>
             </a:fld>
             <a:endParaRPr lang="en-US"/>
           </a:p>
@@ -1009,7 +1007,7 @@
           <a:p>
             <a:fld id="{39951387-8933-43AC-9F1E-E95B326ABA00}" type="datetimeFigureOut">
               <a:rPr lang="en-US" smtClean="0"/>
-              <a:t>9/12/2026</a:t>
+              <a:t>9/21/2026</a:t>
             </a:fld>
             <a:endParaRPr lang="en-US"/>
           </a:p>
@@ -1241,7 +1239,7 @@
           <a:p>
             <a:fld id="{39951387-8933-43AC-9F1E-E95B326ABA00}" type="datetimeFigureOut">
               <a:rPr lang="en-US" smtClean="0"/>
-              <a:t>9/12/2026</a:t>
+              <a:t>9/21/2026</a:t>
             </a:fld>
             <a:endParaRPr lang="en-US"/>
           </a:p>
@@ -1608,7 +1606,7 @@
           <a:p>
             <a:fld id="{39951387-8933-43AC-9F1E-E95B326ABA00}" type="datetimeFigureOut">
               <a:rPr lang="en-US" smtClean="0"/>
-              <a:t>9/12/2026</a:t>
+              <a:t>9/21/2026</a:t>
             </a:fld>
             <a:endParaRPr lang="en-US"/>
           </a:p>
@@ -1726,7 +1724,7 @@
           <a:p>
             <a:fld id="{39951387-8933-43AC-9F1E-E95B326ABA00}" type="datetimeFigureOut">
               <a:rPr lang="en-US" smtClean="0"/>
-              <a:t>9/12/2026</a:t>
+              <a:t>9/21/2026</a:t>
             </a:fld>
             <a:endParaRPr lang="en-US"/>
           </a:p>
@@ -1821,7 +1819,7 @@
           <a:p>
             <a:fld id="{39951387-8933-43AC-9F1E-E95B326ABA00}" type="datetimeFigureOut">
               <a:rPr lang="en-US" smtClean="0"/>
-              <a:t>9/12/2026</a:t>
+              <a:t>9/21/2026</a:t>
             </a:fld>
             <a:endParaRPr lang="en-US"/>
           </a:p>
@@ -2098,7 +2096,7 @@
           <a:p>
             <a:fld id="{39951387-8933-43AC-9F1E-E95B326ABA00}" type="datetimeFigureOut">
               <a:rPr lang="en-US" smtClean="0"/>
-              <a:t>9/12/2026</a:t>
+              <a:t>9/21/2026</a:t>
             </a:fld>
             <a:endParaRPr lang="en-US"/>
           </a:p>
@@ -2355,7 +2353,7 @@
           <a:p>
             <a:fld id="{39951387-8933-43AC-9F1E-E95B326ABA00}" type="datetimeFigureOut">
               <a:rPr lang="en-US" smtClean="0"/>
-              <a:t>9/12/2026</a:t>
+              <a:t>9/21/2026</a:t>
             </a:fld>
             <a:endParaRPr lang="en-US"/>
           </a:p>
@@ -2568,7 +2566,7 @@
           <a:p>
             <a:fld id="{39951387-8933-43AC-9F1E-E95B326ABA00}" type="datetimeFigureOut">
               <a:rPr lang="en-US" smtClean="0"/>
-              <a:t>9/12/2026</a:t>
+              <a:t>9/21/2026</a:t>
             </a:fld>
             <a:endParaRPr lang="en-US"/>
           </a:p>
@@ -2957,4242 +2955,6 @@
 </file>
 
 <file path=ppt/slides/slide1.xml><?xml version="1.0" encoding="utf-8"?>
-<p:sld xmlns:a="http://schemas.openxmlformats.org/drawingml/2006/main" xmlns:r="http://schemas.openxmlformats.org/officeDocument/2006/relationships" xmlns:p="http://schemas.openxmlformats.org/presentationml/2006/main">
-  <p:cSld>
-    <p:spTree>
-      <p:nvGrpSpPr>
-        <p:cNvPr id="1" name=""/>
-        <p:cNvGrpSpPr/>
-        <p:nvPr/>
-      </p:nvGrpSpPr>
-      <p:grpSpPr>
-        <a:xfrm>
-          <a:off x="0" y="0"/>
-          <a:ext cx="0" cy="0"/>
-          <a:chOff x="0" y="0"/>
-          <a:chExt cx="0" cy="0"/>
-        </a:xfrm>
-      </p:grpSpPr>
-      <p:sp>
-        <p:nvSpPr>
-          <p:cNvPr id="5" name="Rectangle 4">
-            <a:extLst>
-              <a:ext uri="{FF2B5EF4-FFF2-40B4-BE49-F238E27FC236}">
-                <a16:creationId xmlns:a16="http://schemas.microsoft.com/office/drawing/2014/main" id="{D1443361-092D-2CDA-AFC1-EE80337E9BFA}"/>
-              </a:ext>
-            </a:extLst>
-          </p:cNvPr>
-          <p:cNvSpPr/>
-          <p:nvPr/>
-        </p:nvSpPr>
-        <p:spPr>
-          <a:xfrm>
-            <a:off x="3973419" y="170259"/>
-            <a:ext cx="1005840" cy="274320"/>
-          </a:xfrm>
-          <a:prstGeom prst="rect">
-            <a:avLst/>
-          </a:prstGeom>
-          <a:solidFill>
-            <a:schemeClr val="accent5">
-              <a:lumMod val="20000"/>
-              <a:lumOff val="80000"/>
-            </a:schemeClr>
-          </a:solidFill>
-          <a:ln w="12700">
-            <a:solidFill>
-              <a:schemeClr val="tx1"/>
-            </a:solidFill>
-          </a:ln>
-        </p:spPr>
-        <p:style>
-          <a:lnRef idx="2">
-            <a:schemeClr val="accent6"/>
-          </a:lnRef>
-          <a:fillRef idx="1">
-            <a:schemeClr val="lt1"/>
-          </a:fillRef>
-          <a:effectRef idx="0">
-            <a:schemeClr val="accent6"/>
-          </a:effectRef>
-          <a:fontRef idx="minor">
-            <a:schemeClr val="dk1"/>
-          </a:fontRef>
-        </p:style>
-        <p:txBody>
-          <a:bodyPr rtlCol="0" anchor="ctr"/>
-          <a:lstStyle/>
-          <a:p>
-            <a:pPr algn="ctr"/>
-            <a:r>
-              <a:rPr lang="it-IT" sz="900" b="1" dirty="0">
-                <a:cs typeface="Times New Roman" panose="02020603050405020304" pitchFamily="18" charset="0"/>
-              </a:rPr>
-              <a:t>Climate Datasets </a:t>
-            </a:r>
-          </a:p>
-          <a:p>
-            <a:pPr algn="ctr"/>
-            <a:r>
-              <a:rPr lang="it-IT" sz="900" dirty="0">
-                <a:cs typeface="Times New Roman" panose="02020603050405020304" pitchFamily="18" charset="0"/>
-              </a:rPr>
-              <a:t>(1982–2022)</a:t>
-            </a:r>
-            <a:endParaRPr lang="en-US" sz="900" dirty="0">
-              <a:cs typeface="Times New Roman" panose="02020603050405020304" pitchFamily="18" charset="0"/>
-            </a:endParaRPr>
-          </a:p>
-        </p:txBody>
-      </p:sp>
-      <p:sp>
-        <p:nvSpPr>
-          <p:cNvPr id="7" name="Rectangle 6">
-            <a:extLst>
-              <a:ext uri="{FF2B5EF4-FFF2-40B4-BE49-F238E27FC236}">
-                <a16:creationId xmlns:a16="http://schemas.microsoft.com/office/drawing/2014/main" id="{57D76488-5254-DC8E-AB9C-ADD739C423AA}"/>
-              </a:ext>
-            </a:extLst>
-          </p:cNvPr>
-          <p:cNvSpPr/>
-          <p:nvPr/>
-        </p:nvSpPr>
-        <p:spPr>
-          <a:xfrm>
-            <a:off x="1987718" y="577891"/>
-            <a:ext cx="1005840" cy="274320"/>
-          </a:xfrm>
-          <a:prstGeom prst="rect">
-            <a:avLst/>
-          </a:prstGeom>
-          <a:solidFill>
-            <a:schemeClr val="accent5">
-              <a:lumMod val="20000"/>
-              <a:lumOff val="80000"/>
-            </a:schemeClr>
-          </a:solidFill>
-          <a:ln w="12700">
-            <a:solidFill>
-              <a:schemeClr val="tx1"/>
-            </a:solidFill>
-          </a:ln>
-        </p:spPr>
-        <p:style>
-          <a:lnRef idx="2">
-            <a:schemeClr val="accent6"/>
-          </a:lnRef>
-          <a:fillRef idx="1">
-            <a:schemeClr val="lt1"/>
-          </a:fillRef>
-          <a:effectRef idx="0">
-            <a:schemeClr val="accent6"/>
-          </a:effectRef>
-          <a:fontRef idx="minor">
-            <a:schemeClr val="dk1"/>
-          </a:fontRef>
-        </p:style>
-        <p:txBody>
-          <a:bodyPr rtlCol="0" anchor="ctr"/>
-          <a:lstStyle/>
-          <a:p>
-            <a:pPr algn="ctr"/>
-            <a:r>
-              <a:rPr lang="it-IT" sz="900" dirty="0">
-                <a:cs typeface="Times New Roman" panose="02020603050405020304" pitchFamily="18" charset="0"/>
-              </a:rPr>
-              <a:t>Tmax | Tmin</a:t>
-            </a:r>
-          </a:p>
-          <a:p>
-            <a:pPr algn="ctr"/>
-            <a:r>
-              <a:rPr lang="it-IT" sz="900" dirty="0">
-                <a:cs typeface="Times New Roman" panose="02020603050405020304" pitchFamily="18" charset="0"/>
-              </a:rPr>
-              <a:t>(From BMD)</a:t>
-            </a:r>
-            <a:endParaRPr lang="en-US" sz="900" dirty="0">
-              <a:cs typeface="Times New Roman" panose="02020603050405020304" pitchFamily="18" charset="0"/>
-            </a:endParaRPr>
-          </a:p>
-        </p:txBody>
-      </p:sp>
-      <p:sp>
-        <p:nvSpPr>
-          <p:cNvPr id="9" name="Rectangle 8">
-            <a:extLst>
-              <a:ext uri="{FF2B5EF4-FFF2-40B4-BE49-F238E27FC236}">
-                <a16:creationId xmlns:a16="http://schemas.microsoft.com/office/drawing/2014/main" id="{ABBD94CC-5A8D-0933-0468-97A5D143377F}"/>
-              </a:ext>
-            </a:extLst>
-          </p:cNvPr>
-          <p:cNvSpPr/>
-          <p:nvPr/>
-        </p:nvSpPr>
-        <p:spPr>
-          <a:xfrm>
-            <a:off x="3333339" y="818850"/>
-            <a:ext cx="2286000" cy="457200"/>
-          </a:xfrm>
-          <a:prstGeom prst="rect">
-            <a:avLst/>
-          </a:prstGeom>
-          <a:solidFill>
-            <a:schemeClr val="accent5">
-              <a:lumMod val="20000"/>
-              <a:lumOff val="80000"/>
-            </a:schemeClr>
-          </a:solidFill>
-          <a:ln w="12700">
-            <a:solidFill>
-              <a:schemeClr val="tx1"/>
-            </a:solidFill>
-          </a:ln>
-        </p:spPr>
-        <p:style>
-          <a:lnRef idx="2">
-            <a:schemeClr val="accent6"/>
-          </a:lnRef>
-          <a:fillRef idx="1">
-            <a:schemeClr val="lt1"/>
-          </a:fillRef>
-          <a:effectRef idx="0">
-            <a:schemeClr val="accent6"/>
-          </a:effectRef>
-          <a:fontRef idx="minor">
-            <a:schemeClr val="dk1"/>
-          </a:fontRef>
-        </p:style>
-        <p:txBody>
-          <a:bodyPr rtlCol="0" anchor="ctr"/>
-          <a:lstStyle/>
-          <a:p>
-            <a:pPr algn="ctr"/>
-            <a:r>
-              <a:rPr lang="en-US" sz="900" dirty="0"/>
-              <a:t>Precipitation Data</a:t>
-            </a:r>
-          </a:p>
-          <a:p>
-            <a:pPr algn="ctr"/>
-            <a:r>
-              <a:rPr lang="en-US" sz="900" dirty="0"/>
-              <a:t>(</a:t>
-            </a:r>
-            <a:r>
-              <a:rPr lang="en-US" sz="900" dirty="0" err="1"/>
-              <a:t>Prcptot</a:t>
-            </a:r>
-            <a:r>
-              <a:rPr lang="en-US" sz="900" dirty="0"/>
-              <a:t>, R10mm, R20mm, Rx1day, Rx5day)</a:t>
-            </a:r>
-          </a:p>
-          <a:p>
-            <a:pPr algn="ctr"/>
-            <a:r>
-              <a:rPr lang="it-IT" sz="900" dirty="0">
-                <a:cs typeface="Times New Roman" panose="02020603050405020304" pitchFamily="18" charset="0"/>
-              </a:rPr>
-              <a:t>(From ETCCDI)</a:t>
-            </a:r>
-            <a:endParaRPr lang="en-US" sz="900" dirty="0">
-              <a:cs typeface="Times New Roman" panose="02020603050405020304" pitchFamily="18" charset="0"/>
-            </a:endParaRPr>
-          </a:p>
-        </p:txBody>
-      </p:sp>
-      <p:sp>
-        <p:nvSpPr>
-          <p:cNvPr id="11" name="Rectangle 10">
-            <a:extLst>
-              <a:ext uri="{FF2B5EF4-FFF2-40B4-BE49-F238E27FC236}">
-                <a16:creationId xmlns:a16="http://schemas.microsoft.com/office/drawing/2014/main" id="{C05BC2B3-07BE-932F-B32E-1C347302738E}"/>
-              </a:ext>
-            </a:extLst>
-          </p:cNvPr>
-          <p:cNvSpPr/>
-          <p:nvPr/>
-        </p:nvSpPr>
-        <p:spPr>
-          <a:xfrm>
-            <a:off x="5959120" y="577891"/>
-            <a:ext cx="1554480" cy="457200"/>
-          </a:xfrm>
-          <a:prstGeom prst="rect">
-            <a:avLst/>
-          </a:prstGeom>
-          <a:solidFill>
-            <a:schemeClr val="accent5">
-              <a:lumMod val="20000"/>
-              <a:lumOff val="80000"/>
-            </a:schemeClr>
-          </a:solidFill>
-          <a:ln w="12700">
-            <a:solidFill>
-              <a:schemeClr val="tx1"/>
-            </a:solidFill>
-          </a:ln>
-        </p:spPr>
-        <p:style>
-          <a:lnRef idx="2">
-            <a:schemeClr val="accent6"/>
-          </a:lnRef>
-          <a:fillRef idx="1">
-            <a:schemeClr val="lt1"/>
-          </a:fillRef>
-          <a:effectRef idx="0">
-            <a:schemeClr val="accent6"/>
-          </a:effectRef>
-          <a:fontRef idx="minor">
-            <a:schemeClr val="dk1"/>
-          </a:fontRef>
-        </p:style>
-        <p:txBody>
-          <a:bodyPr rtlCol="0" anchor="ctr"/>
-          <a:lstStyle/>
-          <a:p>
-            <a:pPr algn="ctr"/>
-            <a:r>
-              <a:rPr lang="en-US" sz="900" dirty="0"/>
-              <a:t>ENSO SST Data </a:t>
-            </a:r>
-          </a:p>
-          <a:p>
-            <a:pPr algn="ctr"/>
-            <a:r>
-              <a:rPr lang="en-US" sz="900" dirty="0"/>
-              <a:t>(Niño 1+2, Niño 3, Niño 3.4)</a:t>
-            </a:r>
-          </a:p>
-          <a:p>
-            <a:pPr algn="ctr"/>
-            <a:r>
-              <a:rPr lang="it-IT" sz="900" dirty="0">
-                <a:cs typeface="Times New Roman" panose="02020603050405020304" pitchFamily="18" charset="0"/>
-              </a:rPr>
-              <a:t>(From </a:t>
-            </a:r>
-            <a:r>
-              <a:rPr lang="en-US" sz="900" dirty="0">
-                <a:cs typeface="Times New Roman" panose="02020603050405020304" pitchFamily="18" charset="0"/>
-              </a:rPr>
-              <a:t>NOAA PSL</a:t>
-            </a:r>
-            <a:r>
-              <a:rPr lang="it-IT" sz="900" dirty="0">
-                <a:cs typeface="Times New Roman" panose="02020603050405020304" pitchFamily="18" charset="0"/>
-              </a:rPr>
-              <a:t>)</a:t>
-            </a:r>
-            <a:endParaRPr lang="en-US" sz="900" dirty="0">
-              <a:cs typeface="Times New Roman" panose="02020603050405020304" pitchFamily="18" charset="0"/>
-            </a:endParaRPr>
-          </a:p>
-        </p:txBody>
-      </p:sp>
-      <p:sp>
-        <p:nvSpPr>
-          <p:cNvPr id="13" name="Rectangle 12">
-            <a:extLst>
-              <a:ext uri="{FF2B5EF4-FFF2-40B4-BE49-F238E27FC236}">
-                <a16:creationId xmlns:a16="http://schemas.microsoft.com/office/drawing/2014/main" id="{6712FBBF-956C-2364-DCFA-9C8B92DDDEF8}"/>
-              </a:ext>
-            </a:extLst>
-          </p:cNvPr>
-          <p:cNvSpPr/>
-          <p:nvPr/>
-        </p:nvSpPr>
-        <p:spPr>
-          <a:xfrm>
-            <a:off x="1903898" y="1221044"/>
-            <a:ext cx="1173480" cy="274320"/>
-          </a:xfrm>
-          <a:prstGeom prst="rect">
-            <a:avLst/>
-          </a:prstGeom>
-          <a:solidFill>
-            <a:schemeClr val="accent5">
-              <a:lumMod val="20000"/>
-              <a:lumOff val="80000"/>
-            </a:schemeClr>
-          </a:solidFill>
-          <a:ln w="12700">
-            <a:solidFill>
-              <a:schemeClr val="tx1"/>
-            </a:solidFill>
-          </a:ln>
-        </p:spPr>
-        <p:style>
-          <a:lnRef idx="2">
-            <a:schemeClr val="accent6"/>
-          </a:lnRef>
-          <a:fillRef idx="1">
-            <a:schemeClr val="lt1"/>
-          </a:fillRef>
-          <a:effectRef idx="0">
-            <a:schemeClr val="accent6"/>
-          </a:effectRef>
-          <a:fontRef idx="minor">
-            <a:schemeClr val="dk1"/>
-          </a:fontRef>
-        </p:style>
-        <p:txBody>
-          <a:bodyPr rtlCol="0" anchor="ctr"/>
-          <a:lstStyle/>
-          <a:p>
-            <a:pPr algn="ctr"/>
-            <a:r>
-              <a:rPr lang="en-US" sz="900" dirty="0"/>
-              <a:t>Quality control and KNN imputation</a:t>
-            </a:r>
-            <a:endParaRPr lang="en-US" sz="900" dirty="0">
-              <a:cs typeface="Times New Roman" panose="02020603050405020304" pitchFamily="18" charset="0"/>
-            </a:endParaRPr>
-          </a:p>
-        </p:txBody>
-      </p:sp>
-      <p:sp>
-        <p:nvSpPr>
-          <p:cNvPr id="15" name="Rectangle 14">
-            <a:extLst>
-              <a:ext uri="{FF2B5EF4-FFF2-40B4-BE49-F238E27FC236}">
-                <a16:creationId xmlns:a16="http://schemas.microsoft.com/office/drawing/2014/main" id="{DC82C551-E682-A8BA-3C86-86E24FC10888}"/>
-              </a:ext>
-            </a:extLst>
-          </p:cNvPr>
-          <p:cNvSpPr/>
-          <p:nvPr/>
-        </p:nvSpPr>
-        <p:spPr>
-          <a:xfrm>
-            <a:off x="3750880" y="1612356"/>
-            <a:ext cx="1450919" cy="274320"/>
-          </a:xfrm>
-          <a:prstGeom prst="rect">
-            <a:avLst/>
-          </a:prstGeom>
-          <a:solidFill>
-            <a:schemeClr val="accent5">
-              <a:lumMod val="20000"/>
-              <a:lumOff val="80000"/>
-            </a:schemeClr>
-          </a:solidFill>
-          <a:ln w="12700">
-            <a:solidFill>
-              <a:schemeClr val="tx1"/>
-            </a:solidFill>
-          </a:ln>
-        </p:spPr>
-        <p:style>
-          <a:lnRef idx="2">
-            <a:schemeClr val="accent6"/>
-          </a:lnRef>
-          <a:fillRef idx="1">
-            <a:schemeClr val="lt1"/>
-          </a:fillRef>
-          <a:effectRef idx="0">
-            <a:schemeClr val="accent6"/>
-          </a:effectRef>
-          <a:fontRef idx="minor">
-            <a:schemeClr val="dk1"/>
-          </a:fontRef>
-        </p:style>
-        <p:txBody>
-          <a:bodyPr rtlCol="0" anchor="ctr"/>
-          <a:lstStyle/>
-          <a:p>
-            <a:pPr algn="ctr"/>
-            <a:r>
-              <a:rPr lang="en-US" sz="900" dirty="0"/>
-              <a:t>STATISTICAL ASSOCIATION</a:t>
-            </a:r>
-          </a:p>
-          <a:p>
-            <a:pPr algn="ctr"/>
-            <a:r>
-              <a:rPr lang="en-US" sz="900" dirty="0"/>
-              <a:t>(Pearson correlation)</a:t>
-            </a:r>
-            <a:endParaRPr lang="en-US" sz="900" dirty="0">
-              <a:cs typeface="Times New Roman" panose="02020603050405020304" pitchFamily="18" charset="0"/>
-            </a:endParaRPr>
-          </a:p>
-        </p:txBody>
-      </p:sp>
-      <p:sp>
-        <p:nvSpPr>
-          <p:cNvPr id="17" name="Rectangle 16">
-            <a:extLst>
-              <a:ext uri="{FF2B5EF4-FFF2-40B4-BE49-F238E27FC236}">
-                <a16:creationId xmlns:a16="http://schemas.microsoft.com/office/drawing/2014/main" id="{AE28F86C-DCF0-FB61-3134-B9C5EE251586}"/>
-              </a:ext>
-            </a:extLst>
-          </p:cNvPr>
-          <p:cNvSpPr/>
-          <p:nvPr/>
-        </p:nvSpPr>
-        <p:spPr>
-          <a:xfrm>
-            <a:off x="3750880" y="2155609"/>
-            <a:ext cx="1450919" cy="191033"/>
-          </a:xfrm>
-          <a:prstGeom prst="rect">
-            <a:avLst/>
-          </a:prstGeom>
-          <a:solidFill>
-            <a:schemeClr val="accent5">
-              <a:lumMod val="20000"/>
-              <a:lumOff val="80000"/>
-            </a:schemeClr>
-          </a:solidFill>
-          <a:ln w="12700">
-            <a:solidFill>
-              <a:schemeClr val="tx1"/>
-            </a:solidFill>
-          </a:ln>
-        </p:spPr>
-        <p:style>
-          <a:lnRef idx="2">
-            <a:schemeClr val="accent6"/>
-          </a:lnRef>
-          <a:fillRef idx="1">
-            <a:schemeClr val="lt1"/>
-          </a:fillRef>
-          <a:effectRef idx="0">
-            <a:schemeClr val="accent6"/>
-          </a:effectRef>
-          <a:fontRef idx="minor">
-            <a:schemeClr val="dk1"/>
-          </a:fontRef>
-        </p:style>
-        <p:txBody>
-          <a:bodyPr rtlCol="0" anchor="ctr"/>
-          <a:lstStyle/>
-          <a:p>
-            <a:pPr algn="ctr"/>
-            <a:r>
-              <a:rPr lang="en-US" sz="900" dirty="0"/>
-              <a:t>PREDICTIVE MODELLING</a:t>
-            </a:r>
-            <a:endParaRPr lang="en-US" sz="900" dirty="0">
-              <a:cs typeface="Times New Roman" panose="02020603050405020304" pitchFamily="18" charset="0"/>
-            </a:endParaRPr>
-          </a:p>
-        </p:txBody>
-      </p:sp>
-      <p:sp>
-        <p:nvSpPr>
-          <p:cNvPr id="19" name="Rectangle 18">
-            <a:extLst>
-              <a:ext uri="{FF2B5EF4-FFF2-40B4-BE49-F238E27FC236}">
-                <a16:creationId xmlns:a16="http://schemas.microsoft.com/office/drawing/2014/main" id="{EBE39DE3-CD02-EA17-B094-077DD7514521}"/>
-              </a:ext>
-            </a:extLst>
-          </p:cNvPr>
-          <p:cNvSpPr/>
-          <p:nvPr/>
-        </p:nvSpPr>
-        <p:spPr>
-          <a:xfrm>
-            <a:off x="1418480" y="3173369"/>
-            <a:ext cx="731520" cy="191033"/>
-          </a:xfrm>
-          <a:prstGeom prst="rect">
-            <a:avLst/>
-          </a:prstGeom>
-          <a:solidFill>
-            <a:schemeClr val="accent5">
-              <a:lumMod val="20000"/>
-              <a:lumOff val="80000"/>
-            </a:schemeClr>
-          </a:solidFill>
-          <a:ln w="12700">
-            <a:solidFill>
-              <a:schemeClr val="tx1"/>
-            </a:solidFill>
-            <a:prstDash val="dash"/>
-          </a:ln>
-        </p:spPr>
-        <p:style>
-          <a:lnRef idx="2">
-            <a:schemeClr val="accent6"/>
-          </a:lnRef>
-          <a:fillRef idx="1">
-            <a:schemeClr val="lt1"/>
-          </a:fillRef>
-          <a:effectRef idx="0">
-            <a:schemeClr val="accent6"/>
-          </a:effectRef>
-          <a:fontRef idx="minor">
-            <a:schemeClr val="dk1"/>
-          </a:fontRef>
-        </p:style>
-        <p:txBody>
-          <a:bodyPr rtlCol="0" anchor="ctr"/>
-          <a:lstStyle/>
-          <a:p>
-            <a:pPr algn="ctr"/>
-            <a:r>
-              <a:rPr lang="en-US" sz="900" dirty="0"/>
-              <a:t>RAW-DATA</a:t>
-            </a:r>
-            <a:endParaRPr lang="en-US" sz="900" dirty="0">
-              <a:cs typeface="Times New Roman" panose="02020603050405020304" pitchFamily="18" charset="0"/>
-            </a:endParaRPr>
-          </a:p>
-        </p:txBody>
-      </p:sp>
-      <p:sp>
-        <p:nvSpPr>
-          <p:cNvPr id="21" name="Rectangle 20">
-            <a:extLst>
-              <a:ext uri="{FF2B5EF4-FFF2-40B4-BE49-F238E27FC236}">
-                <a16:creationId xmlns:a16="http://schemas.microsoft.com/office/drawing/2014/main" id="{A4FD4E5A-4A93-BDEF-2F19-2BABF23209BB}"/>
-              </a:ext>
-            </a:extLst>
-          </p:cNvPr>
-          <p:cNvSpPr/>
-          <p:nvPr/>
-        </p:nvSpPr>
-        <p:spPr>
-          <a:xfrm>
-            <a:off x="2328220" y="3124106"/>
-            <a:ext cx="1450919" cy="289561"/>
-          </a:xfrm>
-          <a:prstGeom prst="rect">
-            <a:avLst/>
-          </a:prstGeom>
-          <a:solidFill>
-            <a:schemeClr val="accent5">
-              <a:lumMod val="20000"/>
-              <a:lumOff val="80000"/>
-            </a:schemeClr>
-          </a:solidFill>
-          <a:ln w="12700">
-            <a:solidFill>
-              <a:schemeClr val="tx1"/>
-            </a:solidFill>
-          </a:ln>
-        </p:spPr>
-        <p:style>
-          <a:lnRef idx="2">
-            <a:schemeClr val="accent6"/>
-          </a:lnRef>
-          <a:fillRef idx="1">
-            <a:schemeClr val="lt1"/>
-          </a:fillRef>
-          <a:effectRef idx="0">
-            <a:schemeClr val="accent6"/>
-          </a:effectRef>
-          <a:fontRef idx="minor">
-            <a:schemeClr val="dk1"/>
-          </a:fontRef>
-        </p:style>
-        <p:txBody>
-          <a:bodyPr rtlCol="0" anchor="ctr"/>
-          <a:lstStyle/>
-          <a:p>
-            <a:pPr algn="ctr"/>
-            <a:r>
-              <a:rPr lang="en-US" sz="900" dirty="0"/>
-              <a:t>Wavelet Decomposition</a:t>
-            </a:r>
-          </a:p>
-          <a:p>
-            <a:pPr algn="ctr"/>
-            <a:r>
-              <a:rPr lang="en-US" sz="900" dirty="0"/>
-              <a:t>(Coif3, Db4, Haar, TQWT)</a:t>
-            </a:r>
-            <a:endParaRPr lang="en-US" sz="900" dirty="0">
-              <a:cs typeface="Times New Roman" panose="02020603050405020304" pitchFamily="18" charset="0"/>
-            </a:endParaRPr>
-          </a:p>
-        </p:txBody>
-      </p:sp>
-      <p:sp>
-        <p:nvSpPr>
-          <p:cNvPr id="23" name="Rectangle 22">
-            <a:extLst>
-              <a:ext uri="{FF2B5EF4-FFF2-40B4-BE49-F238E27FC236}">
-                <a16:creationId xmlns:a16="http://schemas.microsoft.com/office/drawing/2014/main" id="{A6A9D8AE-96BB-448E-FA20-AFD5AAF6548E}"/>
-              </a:ext>
-            </a:extLst>
-          </p:cNvPr>
-          <p:cNvSpPr/>
-          <p:nvPr/>
-        </p:nvSpPr>
-        <p:spPr>
-          <a:xfrm>
-            <a:off x="3750880" y="3721233"/>
-            <a:ext cx="1450919" cy="289561"/>
-          </a:xfrm>
-          <a:prstGeom prst="rect">
-            <a:avLst/>
-          </a:prstGeom>
-          <a:solidFill>
-            <a:schemeClr val="accent5">
-              <a:lumMod val="20000"/>
-              <a:lumOff val="80000"/>
-            </a:schemeClr>
-          </a:solidFill>
-          <a:ln w="12700">
-            <a:solidFill>
-              <a:schemeClr val="tx1"/>
-            </a:solidFill>
-          </a:ln>
-        </p:spPr>
-        <p:style>
-          <a:lnRef idx="2">
-            <a:schemeClr val="accent6"/>
-          </a:lnRef>
-          <a:fillRef idx="1">
-            <a:schemeClr val="lt1"/>
-          </a:fillRef>
-          <a:effectRef idx="0">
-            <a:schemeClr val="accent6"/>
-          </a:effectRef>
-          <a:fontRef idx="minor">
-            <a:schemeClr val="dk1"/>
-          </a:fontRef>
-        </p:style>
-        <p:txBody>
-          <a:bodyPr rtlCol="0" anchor="ctr"/>
-          <a:lstStyle/>
-          <a:p>
-            <a:pPr algn="ctr"/>
-            <a:r>
-              <a:rPr lang="en-US" sz="900" dirty="0"/>
-              <a:t>MLA analysis</a:t>
-            </a:r>
-          </a:p>
-          <a:p>
-            <a:pPr algn="ctr"/>
-            <a:r>
-              <a:rPr lang="en-US" sz="900" dirty="0"/>
-              <a:t>(LGBM| XGB | RF)</a:t>
-            </a:r>
-            <a:endParaRPr lang="en-US" sz="900" dirty="0">
-              <a:cs typeface="Times New Roman" panose="02020603050405020304" pitchFamily="18" charset="0"/>
-            </a:endParaRPr>
-          </a:p>
-        </p:txBody>
-      </p:sp>
-      <p:sp>
-        <p:nvSpPr>
-          <p:cNvPr id="25" name="Rectangle 24">
-            <a:extLst>
-              <a:ext uri="{FF2B5EF4-FFF2-40B4-BE49-F238E27FC236}">
-                <a16:creationId xmlns:a16="http://schemas.microsoft.com/office/drawing/2014/main" id="{9D6B9390-FBCA-984B-DD30-D1E4B8D00CC5}"/>
-              </a:ext>
-            </a:extLst>
-          </p:cNvPr>
-          <p:cNvSpPr/>
-          <p:nvPr/>
-        </p:nvSpPr>
-        <p:spPr>
-          <a:xfrm>
-            <a:off x="2282098" y="4369624"/>
-            <a:ext cx="1543162" cy="289561"/>
-          </a:xfrm>
-          <a:prstGeom prst="rect">
-            <a:avLst/>
-          </a:prstGeom>
-          <a:solidFill>
-            <a:schemeClr val="accent5">
-              <a:lumMod val="20000"/>
-              <a:lumOff val="80000"/>
-            </a:schemeClr>
-          </a:solidFill>
-          <a:ln w="12700">
-            <a:solidFill>
-              <a:schemeClr val="tx1"/>
-            </a:solidFill>
-            <a:prstDash val="dash"/>
-          </a:ln>
-        </p:spPr>
-        <p:style>
-          <a:lnRef idx="2">
-            <a:schemeClr val="accent6"/>
-          </a:lnRef>
-          <a:fillRef idx="1">
-            <a:schemeClr val="lt1"/>
-          </a:fillRef>
-          <a:effectRef idx="0">
-            <a:schemeClr val="accent6"/>
-          </a:effectRef>
-          <a:fontRef idx="minor">
-            <a:schemeClr val="dk1"/>
-          </a:fontRef>
-        </p:style>
-        <p:txBody>
-          <a:bodyPr rtlCol="0" anchor="ctr"/>
-          <a:lstStyle/>
-          <a:p>
-            <a:pPr algn="ctr"/>
-            <a:r>
-              <a:rPr lang="en-US" sz="900" dirty="0"/>
-              <a:t>RAW-DATA PERFORMANCE</a:t>
-            </a:r>
-          </a:p>
-          <a:p>
-            <a:pPr algn="ctr"/>
-            <a:r>
-              <a:rPr lang="en-US" sz="900" dirty="0"/>
-              <a:t>EVALUATION</a:t>
-            </a:r>
-            <a:endParaRPr lang="en-US" sz="900" dirty="0">
-              <a:cs typeface="Times New Roman" panose="02020603050405020304" pitchFamily="18" charset="0"/>
-            </a:endParaRPr>
-          </a:p>
-        </p:txBody>
-      </p:sp>
-      <p:sp>
-        <p:nvSpPr>
-          <p:cNvPr id="27" name="Rectangle 26">
-            <a:extLst>
-              <a:ext uri="{FF2B5EF4-FFF2-40B4-BE49-F238E27FC236}">
-                <a16:creationId xmlns:a16="http://schemas.microsoft.com/office/drawing/2014/main" id="{52B645F7-2ABF-6C1A-A6CF-4E8B773126CE}"/>
-              </a:ext>
-            </a:extLst>
-          </p:cNvPr>
-          <p:cNvSpPr/>
-          <p:nvPr/>
-        </p:nvSpPr>
-        <p:spPr>
-          <a:xfrm>
-            <a:off x="2282098" y="4883773"/>
-            <a:ext cx="1543162" cy="289561"/>
-          </a:xfrm>
-          <a:prstGeom prst="rect">
-            <a:avLst/>
-          </a:prstGeom>
-          <a:solidFill>
-            <a:schemeClr val="accent5">
-              <a:lumMod val="20000"/>
-              <a:lumOff val="80000"/>
-            </a:schemeClr>
-          </a:solidFill>
-          <a:ln w="12700">
-            <a:solidFill>
-              <a:schemeClr val="tx1"/>
-            </a:solidFill>
-            <a:prstDash val="dash"/>
-          </a:ln>
-        </p:spPr>
-        <p:style>
-          <a:lnRef idx="2">
-            <a:schemeClr val="accent6"/>
-          </a:lnRef>
-          <a:fillRef idx="1">
-            <a:schemeClr val="lt1"/>
-          </a:fillRef>
-          <a:effectRef idx="0">
-            <a:schemeClr val="accent6"/>
-          </a:effectRef>
-          <a:fontRef idx="minor">
-            <a:schemeClr val="dk1"/>
-          </a:fontRef>
-        </p:style>
-        <p:txBody>
-          <a:bodyPr rtlCol="0" anchor="ctr"/>
-          <a:lstStyle/>
-          <a:p>
-            <a:pPr algn="ctr"/>
-            <a:r>
-              <a:rPr lang="en-US" sz="900" dirty="0"/>
-              <a:t>RAW vs. DECOMPOSED COMPARISON</a:t>
-            </a:r>
-            <a:endParaRPr lang="en-US" sz="900" dirty="0">
-              <a:cs typeface="Times New Roman" panose="02020603050405020304" pitchFamily="18" charset="0"/>
-            </a:endParaRPr>
-          </a:p>
-        </p:txBody>
-      </p:sp>
-      <p:sp>
-        <p:nvSpPr>
-          <p:cNvPr id="29" name="Rectangle 28">
-            <a:extLst>
-              <a:ext uri="{FF2B5EF4-FFF2-40B4-BE49-F238E27FC236}">
-                <a16:creationId xmlns:a16="http://schemas.microsoft.com/office/drawing/2014/main" id="{FD87C29E-72F0-A994-EBFE-15D3824FC7AE}"/>
-              </a:ext>
-            </a:extLst>
-          </p:cNvPr>
-          <p:cNvSpPr/>
-          <p:nvPr/>
-        </p:nvSpPr>
-        <p:spPr>
-          <a:xfrm>
-            <a:off x="4592098" y="4369624"/>
-            <a:ext cx="2076160" cy="289561"/>
-          </a:xfrm>
-          <a:prstGeom prst="rect">
-            <a:avLst/>
-          </a:prstGeom>
-          <a:solidFill>
-            <a:schemeClr val="accent5">
-              <a:lumMod val="20000"/>
-              <a:lumOff val="80000"/>
-            </a:schemeClr>
-          </a:solidFill>
-          <a:ln w="12700">
-            <a:solidFill>
-              <a:schemeClr val="tx1"/>
-            </a:solidFill>
-          </a:ln>
-        </p:spPr>
-        <p:style>
-          <a:lnRef idx="2">
-            <a:schemeClr val="accent6"/>
-          </a:lnRef>
-          <a:fillRef idx="1">
-            <a:schemeClr val="lt1"/>
-          </a:fillRef>
-          <a:effectRef idx="0">
-            <a:schemeClr val="accent6"/>
-          </a:effectRef>
-          <a:fontRef idx="minor">
-            <a:schemeClr val="dk1"/>
-          </a:fontRef>
-        </p:style>
-        <p:txBody>
-          <a:bodyPr rtlCol="0" anchor="ctr"/>
-          <a:lstStyle/>
-          <a:p>
-            <a:pPr algn="ctr"/>
-            <a:r>
-              <a:rPr lang="en-US" sz="900" dirty="0"/>
-              <a:t>DECOMPOSED-MODEL PERFORMANCE</a:t>
-            </a:r>
-          </a:p>
-          <a:p>
-            <a:pPr algn="ctr"/>
-            <a:r>
-              <a:rPr lang="en-US" sz="900" dirty="0"/>
-              <a:t>EVALUATION</a:t>
-            </a:r>
-            <a:endParaRPr lang="en-US" sz="900" dirty="0">
-              <a:cs typeface="Times New Roman" panose="02020603050405020304" pitchFamily="18" charset="0"/>
-            </a:endParaRPr>
-          </a:p>
-        </p:txBody>
-      </p:sp>
-      <p:sp>
-        <p:nvSpPr>
-          <p:cNvPr id="31" name="Rectangle 30">
-            <a:extLst>
-              <a:ext uri="{FF2B5EF4-FFF2-40B4-BE49-F238E27FC236}">
-                <a16:creationId xmlns:a16="http://schemas.microsoft.com/office/drawing/2014/main" id="{D2E3F21A-4E74-051F-FA72-CEE4331F09BD}"/>
-              </a:ext>
-            </a:extLst>
-          </p:cNvPr>
-          <p:cNvSpPr/>
-          <p:nvPr/>
-        </p:nvSpPr>
-        <p:spPr>
-          <a:xfrm>
-            <a:off x="3438259" y="5643902"/>
-            <a:ext cx="2076160" cy="289561"/>
-          </a:xfrm>
-          <a:prstGeom prst="rect">
-            <a:avLst/>
-          </a:prstGeom>
-          <a:solidFill>
-            <a:schemeClr val="accent5">
-              <a:lumMod val="20000"/>
-              <a:lumOff val="80000"/>
-            </a:schemeClr>
-          </a:solidFill>
-          <a:ln w="12700">
-            <a:solidFill>
-              <a:schemeClr val="tx1"/>
-            </a:solidFill>
-          </a:ln>
-        </p:spPr>
-        <p:style>
-          <a:lnRef idx="2">
-            <a:schemeClr val="accent6"/>
-          </a:lnRef>
-          <a:fillRef idx="1">
-            <a:schemeClr val="lt1"/>
-          </a:fillRef>
-          <a:effectRef idx="0">
-            <a:schemeClr val="accent6"/>
-          </a:effectRef>
-          <a:fontRef idx="minor">
-            <a:schemeClr val="dk1"/>
-          </a:fontRef>
-        </p:style>
-        <p:txBody>
-          <a:bodyPr rtlCol="0" anchor="ctr"/>
-          <a:lstStyle/>
-          <a:p>
-            <a:pPr algn="ctr"/>
-            <a:r>
-              <a:rPr lang="en-US" sz="900" dirty="0"/>
-              <a:t>FINAL COMPARATIVE ANALYSIS</a:t>
-            </a:r>
-            <a:endParaRPr lang="en-US" sz="900" dirty="0">
-              <a:cs typeface="Times New Roman" panose="02020603050405020304" pitchFamily="18" charset="0"/>
-            </a:endParaRPr>
-          </a:p>
-        </p:txBody>
-      </p:sp>
-      <p:cxnSp>
-        <p:nvCxnSpPr>
-          <p:cNvPr id="36" name="Straight Arrow Connector 35">
-            <a:extLst>
-              <a:ext uri="{FF2B5EF4-FFF2-40B4-BE49-F238E27FC236}">
-                <a16:creationId xmlns:a16="http://schemas.microsoft.com/office/drawing/2014/main" id="{ED7560EF-F1F7-9B63-C7A9-B273CA880E7B}"/>
-              </a:ext>
-            </a:extLst>
-          </p:cNvPr>
-          <p:cNvCxnSpPr>
-            <a:stCxn id="5" idx="2"/>
-            <a:endCxn id="9" idx="0"/>
-          </p:cNvCxnSpPr>
-          <p:nvPr/>
-        </p:nvCxnSpPr>
-        <p:spPr>
-          <a:xfrm>
-            <a:off x="4476339" y="444579"/>
-            <a:ext cx="0" cy="374271"/>
-          </a:xfrm>
-          <a:prstGeom prst="straightConnector1">
-            <a:avLst/>
-          </a:prstGeom>
-          <a:ln w="15875">
-            <a:solidFill>
-              <a:schemeClr val="tx1"/>
-            </a:solidFill>
-            <a:tailEnd type="triangle"/>
-          </a:ln>
-        </p:spPr>
-        <p:style>
-          <a:lnRef idx="1">
-            <a:schemeClr val="accent1"/>
-          </a:lnRef>
-          <a:fillRef idx="0">
-            <a:schemeClr val="accent1"/>
-          </a:fillRef>
-          <a:effectRef idx="0">
-            <a:schemeClr val="accent1"/>
-          </a:effectRef>
-          <a:fontRef idx="minor">
-            <a:schemeClr val="tx1"/>
-          </a:fontRef>
-        </p:style>
-      </p:cxnSp>
-      <p:cxnSp>
-        <p:nvCxnSpPr>
-          <p:cNvPr id="38" name="Straight Arrow Connector 37">
-            <a:extLst>
-              <a:ext uri="{FF2B5EF4-FFF2-40B4-BE49-F238E27FC236}">
-                <a16:creationId xmlns:a16="http://schemas.microsoft.com/office/drawing/2014/main" id="{7175C146-F0FC-AFAD-4679-C973B057BDD2}"/>
-              </a:ext>
-            </a:extLst>
-          </p:cNvPr>
-          <p:cNvCxnSpPr>
-            <a:cxnSpLocks/>
-            <a:stCxn id="5" idx="3"/>
-            <a:endCxn id="11" idx="0"/>
-          </p:cNvCxnSpPr>
-          <p:nvPr/>
-        </p:nvCxnSpPr>
-        <p:spPr>
-          <a:xfrm>
-            <a:off x="4979259" y="307419"/>
-            <a:ext cx="1757101" cy="270472"/>
-          </a:xfrm>
-          <a:prstGeom prst="bentConnector2">
-            <a:avLst/>
-          </a:prstGeom>
-          <a:ln w="15875">
-            <a:solidFill>
-              <a:schemeClr val="tx1"/>
-            </a:solidFill>
-            <a:tailEnd type="triangle"/>
-          </a:ln>
-        </p:spPr>
-        <p:style>
-          <a:lnRef idx="1">
-            <a:schemeClr val="accent1"/>
-          </a:lnRef>
-          <a:fillRef idx="0">
-            <a:schemeClr val="accent1"/>
-          </a:fillRef>
-          <a:effectRef idx="0">
-            <a:schemeClr val="accent1"/>
-          </a:effectRef>
-          <a:fontRef idx="minor">
-            <a:schemeClr val="tx1"/>
-          </a:fontRef>
-        </p:style>
-      </p:cxnSp>
-      <p:cxnSp>
-        <p:nvCxnSpPr>
-          <p:cNvPr id="41" name="Straight Arrow Connector 37">
-            <a:extLst>
-              <a:ext uri="{FF2B5EF4-FFF2-40B4-BE49-F238E27FC236}">
-                <a16:creationId xmlns:a16="http://schemas.microsoft.com/office/drawing/2014/main" id="{F7C51CE3-C54A-CBDD-5C8B-2A24BAE56DD4}"/>
-              </a:ext>
-            </a:extLst>
-          </p:cNvPr>
-          <p:cNvCxnSpPr>
-            <a:cxnSpLocks/>
-            <a:stCxn id="5" idx="1"/>
-            <a:endCxn id="7" idx="0"/>
-          </p:cNvCxnSpPr>
-          <p:nvPr/>
-        </p:nvCxnSpPr>
-        <p:spPr>
-          <a:xfrm rot="10800000" flipV="1">
-            <a:off x="2490639" y="307419"/>
-            <a:ext cx="1482781" cy="270472"/>
-          </a:xfrm>
-          <a:prstGeom prst="bentConnector2">
-            <a:avLst/>
-          </a:prstGeom>
-          <a:ln w="15875">
-            <a:solidFill>
-              <a:schemeClr val="tx1"/>
-            </a:solidFill>
-            <a:tailEnd type="triangle"/>
-          </a:ln>
-        </p:spPr>
-        <p:style>
-          <a:lnRef idx="1">
-            <a:schemeClr val="accent1"/>
-          </a:lnRef>
-          <a:fillRef idx="0">
-            <a:schemeClr val="accent1"/>
-          </a:fillRef>
-          <a:effectRef idx="0">
-            <a:schemeClr val="accent1"/>
-          </a:effectRef>
-          <a:fontRef idx="minor">
-            <a:schemeClr val="tx1"/>
-          </a:fontRef>
-        </p:style>
-      </p:cxnSp>
-      <p:cxnSp>
-        <p:nvCxnSpPr>
-          <p:cNvPr id="50" name="Straight Arrow Connector 49">
-            <a:extLst>
-              <a:ext uri="{FF2B5EF4-FFF2-40B4-BE49-F238E27FC236}">
-                <a16:creationId xmlns:a16="http://schemas.microsoft.com/office/drawing/2014/main" id="{F7796FD0-122D-9497-D7FA-980DD71875D8}"/>
-              </a:ext>
-            </a:extLst>
-          </p:cNvPr>
-          <p:cNvCxnSpPr>
-            <a:cxnSpLocks/>
-            <a:stCxn id="7" idx="2"/>
-            <a:endCxn id="13" idx="0"/>
-          </p:cNvCxnSpPr>
-          <p:nvPr/>
-        </p:nvCxnSpPr>
-        <p:spPr>
-          <a:xfrm>
-            <a:off x="2490638" y="852211"/>
-            <a:ext cx="0" cy="368833"/>
-          </a:xfrm>
-          <a:prstGeom prst="straightConnector1">
-            <a:avLst/>
-          </a:prstGeom>
-          <a:ln w="15875">
-            <a:solidFill>
-              <a:schemeClr val="tx1"/>
-            </a:solidFill>
-            <a:tailEnd type="triangle"/>
-          </a:ln>
-        </p:spPr>
-        <p:style>
-          <a:lnRef idx="1">
-            <a:schemeClr val="accent1"/>
-          </a:lnRef>
-          <a:fillRef idx="0">
-            <a:schemeClr val="accent1"/>
-          </a:fillRef>
-          <a:effectRef idx="0">
-            <a:schemeClr val="accent1"/>
-          </a:effectRef>
-          <a:fontRef idx="minor">
-            <a:schemeClr val="tx1"/>
-          </a:fontRef>
-        </p:style>
-      </p:cxnSp>
-      <p:cxnSp>
-        <p:nvCxnSpPr>
-          <p:cNvPr id="55" name="Straight Arrow Connector 37">
-            <a:extLst>
-              <a:ext uri="{FF2B5EF4-FFF2-40B4-BE49-F238E27FC236}">
-                <a16:creationId xmlns:a16="http://schemas.microsoft.com/office/drawing/2014/main" id="{9D74935C-9FFD-A66C-30FB-4CD60E7E8D22}"/>
-              </a:ext>
-            </a:extLst>
-          </p:cNvPr>
-          <p:cNvCxnSpPr>
-            <a:cxnSpLocks/>
-            <a:stCxn id="13" idx="2"/>
-            <a:endCxn id="15" idx="1"/>
-          </p:cNvCxnSpPr>
-          <p:nvPr/>
-        </p:nvCxnSpPr>
-        <p:spPr>
-          <a:xfrm rot="16200000" flipH="1">
-            <a:off x="2993683" y="992319"/>
-            <a:ext cx="254152" cy="1260242"/>
-          </a:xfrm>
-          <a:prstGeom prst="bentConnector2">
-            <a:avLst/>
-          </a:prstGeom>
-          <a:ln w="15875">
-            <a:solidFill>
-              <a:schemeClr val="tx1"/>
-            </a:solidFill>
-            <a:tailEnd type="triangle"/>
-          </a:ln>
-        </p:spPr>
-        <p:style>
-          <a:lnRef idx="1">
-            <a:schemeClr val="accent1"/>
-          </a:lnRef>
-          <a:fillRef idx="0">
-            <a:schemeClr val="accent1"/>
-          </a:fillRef>
-          <a:effectRef idx="0">
-            <a:schemeClr val="accent1"/>
-          </a:effectRef>
-          <a:fontRef idx="minor">
-            <a:schemeClr val="tx1"/>
-          </a:fontRef>
-        </p:style>
-      </p:cxnSp>
-      <p:cxnSp>
-        <p:nvCxnSpPr>
-          <p:cNvPr id="68" name="Straight Arrow Connector 37">
-            <a:extLst>
-              <a:ext uri="{FF2B5EF4-FFF2-40B4-BE49-F238E27FC236}">
-                <a16:creationId xmlns:a16="http://schemas.microsoft.com/office/drawing/2014/main" id="{D012A59A-3ECD-7769-47BC-00731193DE60}"/>
-              </a:ext>
-            </a:extLst>
-          </p:cNvPr>
-          <p:cNvCxnSpPr>
-            <a:cxnSpLocks/>
-            <a:stCxn id="11" idx="2"/>
-            <a:endCxn id="15" idx="3"/>
-          </p:cNvCxnSpPr>
-          <p:nvPr/>
-        </p:nvCxnSpPr>
-        <p:spPr>
-          <a:xfrm rot="5400000">
-            <a:off x="5611868" y="625023"/>
-            <a:ext cx="714425" cy="1534561"/>
-          </a:xfrm>
-          <a:prstGeom prst="bentConnector2">
-            <a:avLst/>
-          </a:prstGeom>
-          <a:ln w="15875">
-            <a:solidFill>
-              <a:schemeClr val="tx1"/>
-            </a:solidFill>
-            <a:tailEnd type="triangle"/>
-          </a:ln>
-        </p:spPr>
-        <p:style>
-          <a:lnRef idx="1">
-            <a:schemeClr val="accent1"/>
-          </a:lnRef>
-          <a:fillRef idx="0">
-            <a:schemeClr val="accent1"/>
-          </a:fillRef>
-          <a:effectRef idx="0">
-            <a:schemeClr val="accent1"/>
-          </a:effectRef>
-          <a:fontRef idx="minor">
-            <a:schemeClr val="tx1"/>
-          </a:fontRef>
-        </p:style>
-      </p:cxnSp>
-      <p:cxnSp>
-        <p:nvCxnSpPr>
-          <p:cNvPr id="71" name="Straight Arrow Connector 70">
-            <a:extLst>
-              <a:ext uri="{FF2B5EF4-FFF2-40B4-BE49-F238E27FC236}">
-                <a16:creationId xmlns:a16="http://schemas.microsoft.com/office/drawing/2014/main" id="{6DB6CA07-8749-DBF3-4F67-AB91E4C51438}"/>
-              </a:ext>
-            </a:extLst>
-          </p:cNvPr>
-          <p:cNvCxnSpPr>
-            <a:cxnSpLocks/>
-            <a:stCxn id="9" idx="2"/>
-            <a:endCxn id="15" idx="0"/>
-          </p:cNvCxnSpPr>
-          <p:nvPr/>
-        </p:nvCxnSpPr>
-        <p:spPr>
-          <a:xfrm>
-            <a:off x="4476339" y="1276050"/>
-            <a:ext cx="1" cy="336306"/>
-          </a:xfrm>
-          <a:prstGeom prst="straightConnector1">
-            <a:avLst/>
-          </a:prstGeom>
-          <a:ln w="15875">
-            <a:solidFill>
-              <a:schemeClr val="tx1"/>
-            </a:solidFill>
-            <a:tailEnd type="triangle"/>
-          </a:ln>
-        </p:spPr>
-        <p:style>
-          <a:lnRef idx="1">
-            <a:schemeClr val="accent1"/>
-          </a:lnRef>
-          <a:fillRef idx="0">
-            <a:schemeClr val="accent1"/>
-          </a:fillRef>
-          <a:effectRef idx="0">
-            <a:schemeClr val="accent1"/>
-          </a:effectRef>
-          <a:fontRef idx="minor">
-            <a:schemeClr val="tx1"/>
-          </a:fontRef>
-        </p:style>
-      </p:cxnSp>
-      <p:cxnSp>
-        <p:nvCxnSpPr>
-          <p:cNvPr id="79" name="Straight Arrow Connector 78">
-            <a:extLst>
-              <a:ext uri="{FF2B5EF4-FFF2-40B4-BE49-F238E27FC236}">
-                <a16:creationId xmlns:a16="http://schemas.microsoft.com/office/drawing/2014/main" id="{92FD695F-5675-5FFB-0044-3A030FA1BE74}"/>
-              </a:ext>
-            </a:extLst>
-          </p:cNvPr>
-          <p:cNvCxnSpPr>
-            <a:cxnSpLocks/>
-            <a:stCxn id="15" idx="2"/>
-            <a:endCxn id="17" idx="0"/>
-          </p:cNvCxnSpPr>
-          <p:nvPr/>
-        </p:nvCxnSpPr>
-        <p:spPr>
-          <a:xfrm>
-            <a:off x="4476340" y="1886676"/>
-            <a:ext cx="0" cy="268933"/>
-          </a:xfrm>
-          <a:prstGeom prst="straightConnector1">
-            <a:avLst/>
-          </a:prstGeom>
-          <a:ln w="15875">
-            <a:solidFill>
-              <a:schemeClr val="tx1"/>
-            </a:solidFill>
-            <a:tailEnd type="triangle"/>
-          </a:ln>
-        </p:spPr>
-        <p:style>
-          <a:lnRef idx="1">
-            <a:schemeClr val="accent1"/>
-          </a:lnRef>
-          <a:fillRef idx="0">
-            <a:schemeClr val="accent1"/>
-          </a:fillRef>
-          <a:effectRef idx="0">
-            <a:schemeClr val="accent1"/>
-          </a:effectRef>
-          <a:fontRef idx="minor">
-            <a:schemeClr val="tx1"/>
-          </a:fontRef>
-        </p:style>
-      </p:cxnSp>
-      <p:cxnSp>
-        <p:nvCxnSpPr>
-          <p:cNvPr id="86" name="Straight Arrow Connector 37">
-            <a:extLst>
-              <a:ext uri="{FF2B5EF4-FFF2-40B4-BE49-F238E27FC236}">
-                <a16:creationId xmlns:a16="http://schemas.microsoft.com/office/drawing/2014/main" id="{416241E1-F931-F8D7-A44C-AAB5872A57E4}"/>
-              </a:ext>
-            </a:extLst>
-          </p:cNvPr>
-          <p:cNvCxnSpPr>
-            <a:cxnSpLocks/>
-            <a:stCxn id="118" idx="1"/>
-            <a:endCxn id="19" idx="0"/>
-          </p:cNvCxnSpPr>
-          <p:nvPr/>
-        </p:nvCxnSpPr>
-        <p:spPr>
-          <a:xfrm rot="10800000" flipV="1">
-            <a:off x="1784241" y="2760065"/>
-            <a:ext cx="720799" cy="413304"/>
-          </a:xfrm>
-          <a:prstGeom prst="bentConnector2">
-            <a:avLst/>
-          </a:prstGeom>
-          <a:ln w="15875">
-            <a:solidFill>
-              <a:schemeClr val="tx1"/>
-            </a:solidFill>
-            <a:prstDash val="dash"/>
-            <a:tailEnd type="triangle"/>
-          </a:ln>
-        </p:spPr>
-        <p:style>
-          <a:lnRef idx="1">
-            <a:schemeClr val="accent1"/>
-          </a:lnRef>
-          <a:fillRef idx="0">
-            <a:schemeClr val="accent1"/>
-          </a:fillRef>
-          <a:effectRef idx="0">
-            <a:schemeClr val="accent1"/>
-          </a:effectRef>
-          <a:fontRef idx="minor">
-            <a:schemeClr val="tx1"/>
-          </a:fontRef>
-        </p:style>
-      </p:cxnSp>
-      <p:cxnSp>
-        <p:nvCxnSpPr>
-          <p:cNvPr id="89" name="Straight Arrow Connector 37">
-            <a:extLst>
-              <a:ext uri="{FF2B5EF4-FFF2-40B4-BE49-F238E27FC236}">
-                <a16:creationId xmlns:a16="http://schemas.microsoft.com/office/drawing/2014/main" id="{45A8959F-A5B7-AAE1-7851-F7B699D1D9FD}"/>
-              </a:ext>
-            </a:extLst>
-          </p:cNvPr>
-          <p:cNvCxnSpPr>
-            <a:cxnSpLocks/>
-            <a:stCxn id="118" idx="2"/>
-            <a:endCxn id="21" idx="0"/>
-          </p:cNvCxnSpPr>
-          <p:nvPr/>
-        </p:nvCxnSpPr>
-        <p:spPr>
-          <a:xfrm>
-            <a:off x="3053679" y="2897225"/>
-            <a:ext cx="1" cy="226881"/>
-          </a:xfrm>
-          <a:prstGeom prst="straightConnector1">
-            <a:avLst/>
-          </a:prstGeom>
-          <a:ln w="15875">
-            <a:solidFill>
-              <a:schemeClr val="tx1"/>
-            </a:solidFill>
-            <a:tailEnd type="triangle"/>
-          </a:ln>
-        </p:spPr>
-        <p:style>
-          <a:lnRef idx="1">
-            <a:schemeClr val="accent1"/>
-          </a:lnRef>
-          <a:fillRef idx="0">
-            <a:schemeClr val="accent1"/>
-          </a:fillRef>
-          <a:effectRef idx="0">
-            <a:schemeClr val="accent1"/>
-          </a:effectRef>
-          <a:fontRef idx="minor">
-            <a:schemeClr val="tx1"/>
-          </a:fontRef>
-        </p:style>
-      </p:cxnSp>
-      <p:cxnSp>
-        <p:nvCxnSpPr>
-          <p:cNvPr id="92" name="Straight Arrow Connector 37">
-            <a:extLst>
-              <a:ext uri="{FF2B5EF4-FFF2-40B4-BE49-F238E27FC236}">
-                <a16:creationId xmlns:a16="http://schemas.microsoft.com/office/drawing/2014/main" id="{A49B5E19-5D7A-02BB-AF3F-A01FE1FF5D3B}"/>
-              </a:ext>
-            </a:extLst>
-          </p:cNvPr>
-          <p:cNvCxnSpPr>
-            <a:cxnSpLocks/>
-            <a:stCxn id="19" idx="2"/>
-            <a:endCxn id="23" idx="1"/>
-          </p:cNvCxnSpPr>
-          <p:nvPr/>
-        </p:nvCxnSpPr>
-        <p:spPr>
-          <a:xfrm rot="16200000" flipH="1">
-            <a:off x="2516754" y="2631888"/>
-            <a:ext cx="501612" cy="1966640"/>
-          </a:xfrm>
-          <a:prstGeom prst="bentConnector2">
-            <a:avLst/>
-          </a:prstGeom>
-          <a:ln w="15875">
-            <a:solidFill>
-              <a:schemeClr val="tx1"/>
-            </a:solidFill>
-            <a:prstDash val="dash"/>
-            <a:tailEnd type="triangle"/>
-          </a:ln>
-        </p:spPr>
-        <p:style>
-          <a:lnRef idx="1">
-            <a:schemeClr val="accent1"/>
-          </a:lnRef>
-          <a:fillRef idx="0">
-            <a:schemeClr val="accent1"/>
-          </a:fillRef>
-          <a:effectRef idx="0">
-            <a:schemeClr val="accent1"/>
-          </a:effectRef>
-          <a:fontRef idx="minor">
-            <a:schemeClr val="tx1"/>
-          </a:fontRef>
-        </p:style>
-      </p:cxnSp>
-      <p:cxnSp>
-        <p:nvCxnSpPr>
-          <p:cNvPr id="93" name="Straight Arrow Connector 37">
-            <a:extLst>
-              <a:ext uri="{FF2B5EF4-FFF2-40B4-BE49-F238E27FC236}">
-                <a16:creationId xmlns:a16="http://schemas.microsoft.com/office/drawing/2014/main" id="{C4C3EF14-1702-191D-F8DD-28B445B555AE}"/>
-              </a:ext>
-            </a:extLst>
-          </p:cNvPr>
-          <p:cNvCxnSpPr>
-            <a:cxnSpLocks/>
-            <a:stCxn id="21" idx="2"/>
-            <a:endCxn id="23" idx="1"/>
-          </p:cNvCxnSpPr>
-          <p:nvPr/>
-        </p:nvCxnSpPr>
-        <p:spPr>
-          <a:xfrm rot="16200000" flipH="1">
-            <a:off x="3176107" y="3291240"/>
-            <a:ext cx="452347" cy="697200"/>
-          </a:xfrm>
-          <a:prstGeom prst="bentConnector2">
-            <a:avLst/>
-          </a:prstGeom>
-          <a:ln w="15875">
-            <a:solidFill>
-              <a:schemeClr val="tx1"/>
-            </a:solidFill>
-            <a:tailEnd type="triangle"/>
-          </a:ln>
-        </p:spPr>
-        <p:style>
-          <a:lnRef idx="1">
-            <a:schemeClr val="accent1"/>
-          </a:lnRef>
-          <a:fillRef idx="0">
-            <a:schemeClr val="accent1"/>
-          </a:fillRef>
-          <a:effectRef idx="0">
-            <a:schemeClr val="accent1"/>
-          </a:effectRef>
-          <a:fontRef idx="minor">
-            <a:schemeClr val="tx1"/>
-          </a:fontRef>
-        </p:style>
-      </p:cxnSp>
-      <p:cxnSp>
-        <p:nvCxnSpPr>
-          <p:cNvPr id="98" name="Straight Arrow Connector 37">
-            <a:extLst>
-              <a:ext uri="{FF2B5EF4-FFF2-40B4-BE49-F238E27FC236}">
-                <a16:creationId xmlns:a16="http://schemas.microsoft.com/office/drawing/2014/main" id="{6DA299AE-90FE-BA86-AF11-D465623CA8F1}"/>
-              </a:ext>
-            </a:extLst>
-          </p:cNvPr>
-          <p:cNvCxnSpPr>
-            <a:cxnSpLocks/>
-            <a:stCxn id="23" idx="2"/>
-            <a:endCxn id="25" idx="0"/>
-          </p:cNvCxnSpPr>
-          <p:nvPr/>
-        </p:nvCxnSpPr>
-        <p:spPr>
-          <a:xfrm rot="5400000">
-            <a:off x="3585595" y="3478879"/>
-            <a:ext cx="358830" cy="1422661"/>
-          </a:xfrm>
-          <a:prstGeom prst="bentConnector3">
-            <a:avLst>
-              <a:gd name="adj1" fmla="val 50000"/>
-            </a:avLst>
-          </a:prstGeom>
-          <a:ln w="15875">
-            <a:solidFill>
-              <a:schemeClr val="tx1"/>
-            </a:solidFill>
-            <a:prstDash val="dash"/>
-            <a:tailEnd type="triangle"/>
-          </a:ln>
-        </p:spPr>
-        <p:style>
-          <a:lnRef idx="1">
-            <a:schemeClr val="accent1"/>
-          </a:lnRef>
-          <a:fillRef idx="0">
-            <a:schemeClr val="accent1"/>
-          </a:fillRef>
-          <a:effectRef idx="0">
-            <a:schemeClr val="accent1"/>
-          </a:effectRef>
-          <a:fontRef idx="minor">
-            <a:schemeClr val="tx1"/>
-          </a:fontRef>
-        </p:style>
-      </p:cxnSp>
-      <p:cxnSp>
-        <p:nvCxnSpPr>
-          <p:cNvPr id="101" name="Straight Arrow Connector 37">
-            <a:extLst>
-              <a:ext uri="{FF2B5EF4-FFF2-40B4-BE49-F238E27FC236}">
-                <a16:creationId xmlns:a16="http://schemas.microsoft.com/office/drawing/2014/main" id="{385D8FDC-A2B2-3A79-8206-F15895F60EDA}"/>
-              </a:ext>
-            </a:extLst>
-          </p:cNvPr>
-          <p:cNvCxnSpPr>
-            <a:cxnSpLocks/>
-            <a:stCxn id="23" idx="2"/>
-            <a:endCxn id="29" idx="0"/>
-          </p:cNvCxnSpPr>
-          <p:nvPr/>
-        </p:nvCxnSpPr>
-        <p:spPr>
-          <a:xfrm rot="16200000" flipH="1">
-            <a:off x="4873844" y="3613290"/>
-            <a:ext cx="358830" cy="1153838"/>
-          </a:xfrm>
-          <a:prstGeom prst="bentConnector3">
-            <a:avLst>
-              <a:gd name="adj1" fmla="val 50000"/>
-            </a:avLst>
-          </a:prstGeom>
-          <a:ln w="15875">
-            <a:solidFill>
-              <a:schemeClr val="tx1"/>
-            </a:solidFill>
-            <a:tailEnd type="triangle"/>
-          </a:ln>
-        </p:spPr>
-        <p:style>
-          <a:lnRef idx="1">
-            <a:schemeClr val="accent1"/>
-          </a:lnRef>
-          <a:fillRef idx="0">
-            <a:schemeClr val="accent1"/>
-          </a:fillRef>
-          <a:effectRef idx="0">
-            <a:schemeClr val="accent1"/>
-          </a:effectRef>
-          <a:fontRef idx="minor">
-            <a:schemeClr val="tx1"/>
-          </a:fontRef>
-        </p:style>
-      </p:cxnSp>
-      <p:cxnSp>
-        <p:nvCxnSpPr>
-          <p:cNvPr id="104" name="Straight Arrow Connector 37">
-            <a:extLst>
-              <a:ext uri="{FF2B5EF4-FFF2-40B4-BE49-F238E27FC236}">
-                <a16:creationId xmlns:a16="http://schemas.microsoft.com/office/drawing/2014/main" id="{F2B19D1D-23C8-75FC-3A5E-82A762693E09}"/>
-              </a:ext>
-            </a:extLst>
-          </p:cNvPr>
-          <p:cNvCxnSpPr>
-            <a:cxnSpLocks/>
-            <a:stCxn id="25" idx="2"/>
-            <a:endCxn id="27" idx="0"/>
-          </p:cNvCxnSpPr>
-          <p:nvPr/>
-        </p:nvCxnSpPr>
-        <p:spPr>
-          <a:xfrm>
-            <a:off x="3053679" y="4659185"/>
-            <a:ext cx="0" cy="224588"/>
-          </a:xfrm>
-          <a:prstGeom prst="straightConnector1">
-            <a:avLst/>
-          </a:prstGeom>
-          <a:ln w="15875">
-            <a:solidFill>
-              <a:schemeClr val="tx1"/>
-            </a:solidFill>
-            <a:prstDash val="dash"/>
-            <a:tailEnd type="triangle"/>
-          </a:ln>
-        </p:spPr>
-        <p:style>
-          <a:lnRef idx="1">
-            <a:schemeClr val="accent1"/>
-          </a:lnRef>
-          <a:fillRef idx="0">
-            <a:schemeClr val="accent1"/>
-          </a:fillRef>
-          <a:effectRef idx="0">
-            <a:schemeClr val="accent1"/>
-          </a:effectRef>
-          <a:fontRef idx="minor">
-            <a:schemeClr val="tx1"/>
-          </a:fontRef>
-        </p:style>
-      </p:cxnSp>
-      <p:cxnSp>
-        <p:nvCxnSpPr>
-          <p:cNvPr id="107" name="Straight Arrow Connector 37">
-            <a:extLst>
-              <a:ext uri="{FF2B5EF4-FFF2-40B4-BE49-F238E27FC236}">
-                <a16:creationId xmlns:a16="http://schemas.microsoft.com/office/drawing/2014/main" id="{F0F33668-5211-38AF-DCFF-C85F33C44FFF}"/>
-              </a:ext>
-            </a:extLst>
-          </p:cNvPr>
-          <p:cNvCxnSpPr>
-            <a:cxnSpLocks/>
-            <a:stCxn id="29" idx="2"/>
-            <a:endCxn id="31" idx="0"/>
-          </p:cNvCxnSpPr>
-          <p:nvPr/>
-        </p:nvCxnSpPr>
-        <p:spPr>
-          <a:xfrm rot="5400000">
-            <a:off x="4560901" y="4574624"/>
-            <a:ext cx="984717" cy="1153839"/>
-          </a:xfrm>
-          <a:prstGeom prst="bentConnector3">
-            <a:avLst>
-              <a:gd name="adj1" fmla="val 50000"/>
-            </a:avLst>
-          </a:prstGeom>
-          <a:ln w="15875">
-            <a:solidFill>
-              <a:schemeClr val="tx1"/>
-            </a:solidFill>
-            <a:tailEnd type="triangle"/>
-          </a:ln>
-        </p:spPr>
-        <p:style>
-          <a:lnRef idx="1">
-            <a:schemeClr val="accent1"/>
-          </a:lnRef>
-          <a:fillRef idx="0">
-            <a:schemeClr val="accent1"/>
-          </a:fillRef>
-          <a:effectRef idx="0">
-            <a:schemeClr val="accent1"/>
-          </a:effectRef>
-          <a:fontRef idx="minor">
-            <a:schemeClr val="tx1"/>
-          </a:fontRef>
-        </p:style>
-      </p:cxnSp>
-      <p:sp>
-        <p:nvSpPr>
-          <p:cNvPr id="118" name="Rectangle 117">
-            <a:extLst>
-              <a:ext uri="{FF2B5EF4-FFF2-40B4-BE49-F238E27FC236}">
-                <a16:creationId xmlns:a16="http://schemas.microsoft.com/office/drawing/2014/main" id="{C5AD46C2-B654-2FD0-3ADA-CA808500111F}"/>
-              </a:ext>
-            </a:extLst>
-          </p:cNvPr>
-          <p:cNvSpPr/>
-          <p:nvPr/>
-        </p:nvSpPr>
-        <p:spPr>
-          <a:xfrm>
-            <a:off x="2505039" y="2622905"/>
-            <a:ext cx="1097280" cy="274320"/>
-          </a:xfrm>
-          <a:prstGeom prst="rect">
-            <a:avLst/>
-          </a:prstGeom>
-          <a:solidFill>
-            <a:schemeClr val="accent5">
-              <a:lumMod val="20000"/>
-              <a:lumOff val="80000"/>
-            </a:schemeClr>
-          </a:solidFill>
-          <a:ln w="12700">
-            <a:solidFill>
-              <a:schemeClr val="tx1"/>
-            </a:solidFill>
-          </a:ln>
-        </p:spPr>
-        <p:style>
-          <a:lnRef idx="2">
-            <a:schemeClr val="accent6"/>
-          </a:lnRef>
-          <a:fillRef idx="1">
-            <a:schemeClr val="lt1"/>
-          </a:fillRef>
-          <a:effectRef idx="0">
-            <a:schemeClr val="accent6"/>
-          </a:effectRef>
-          <a:fontRef idx="minor">
-            <a:schemeClr val="dk1"/>
-          </a:fontRef>
-        </p:style>
-        <p:txBody>
-          <a:bodyPr rtlCol="0" anchor="ctr"/>
-          <a:lstStyle/>
-          <a:p>
-            <a:pPr algn="ctr"/>
-            <a:r>
-              <a:rPr lang="en-US" sz="900" b="1" i="1" dirty="0">
-                <a:cs typeface="Times New Roman" panose="02020603050405020304" pitchFamily="18" charset="0"/>
-              </a:rPr>
-              <a:t>Predictors</a:t>
-            </a:r>
-          </a:p>
-          <a:p>
-            <a:pPr algn="ctr"/>
-            <a:r>
-              <a:rPr lang="en-US" sz="900" dirty="0" err="1"/>
-              <a:t>Tmax</a:t>
-            </a:r>
-            <a:r>
-              <a:rPr lang="en-US" sz="900" dirty="0"/>
-              <a:t> | </a:t>
-            </a:r>
-            <a:r>
-              <a:rPr lang="en-US" sz="900" dirty="0" err="1"/>
-              <a:t>Tmin</a:t>
-            </a:r>
-            <a:r>
-              <a:rPr lang="en-US" sz="900" dirty="0"/>
-              <a:t> | </a:t>
-            </a:r>
-            <a:r>
-              <a:rPr lang="en-US" sz="900" dirty="0" err="1"/>
-              <a:t>Prcp</a:t>
-            </a:r>
-            <a:endParaRPr lang="en-US" sz="900" dirty="0">
-              <a:cs typeface="Times New Roman" panose="02020603050405020304" pitchFamily="18" charset="0"/>
-            </a:endParaRPr>
-          </a:p>
-        </p:txBody>
-      </p:sp>
-      <p:cxnSp>
-        <p:nvCxnSpPr>
-          <p:cNvPr id="124" name="Straight Arrow Connector 123">
-            <a:extLst>
-              <a:ext uri="{FF2B5EF4-FFF2-40B4-BE49-F238E27FC236}">
-                <a16:creationId xmlns:a16="http://schemas.microsoft.com/office/drawing/2014/main" id="{4BE4FA69-DCF8-65E2-110A-A284F327B5E4}"/>
-              </a:ext>
-            </a:extLst>
-          </p:cNvPr>
-          <p:cNvCxnSpPr>
-            <a:cxnSpLocks/>
-            <a:stCxn id="17" idx="1"/>
-            <a:endCxn id="118" idx="0"/>
-          </p:cNvCxnSpPr>
-          <p:nvPr/>
-        </p:nvCxnSpPr>
-        <p:spPr>
-          <a:xfrm rot="10800000" flipV="1">
-            <a:off x="3053680" y="2251125"/>
-            <a:ext cx="697201" cy="371779"/>
-          </a:xfrm>
-          <a:prstGeom prst="bentConnector2">
-            <a:avLst/>
-          </a:prstGeom>
-          <a:ln w="15875">
-            <a:solidFill>
-              <a:schemeClr val="tx1"/>
-            </a:solidFill>
-            <a:tailEnd type="triangle"/>
-          </a:ln>
-        </p:spPr>
-        <p:style>
-          <a:lnRef idx="1">
-            <a:schemeClr val="accent1"/>
-          </a:lnRef>
-          <a:fillRef idx="0">
-            <a:schemeClr val="accent1"/>
-          </a:fillRef>
-          <a:effectRef idx="0">
-            <a:schemeClr val="accent1"/>
-          </a:effectRef>
-          <a:fontRef idx="minor">
-            <a:schemeClr val="tx1"/>
-          </a:fontRef>
-        </p:style>
-      </p:cxnSp>
-      <p:sp>
-        <p:nvSpPr>
-          <p:cNvPr id="140" name="Rectangle 139">
-            <a:extLst>
-              <a:ext uri="{FF2B5EF4-FFF2-40B4-BE49-F238E27FC236}">
-                <a16:creationId xmlns:a16="http://schemas.microsoft.com/office/drawing/2014/main" id="{60F92A0B-E88D-FA5A-16DB-2A6633D9237D}"/>
-              </a:ext>
-            </a:extLst>
-          </p:cNvPr>
-          <p:cNvSpPr/>
-          <p:nvPr/>
-        </p:nvSpPr>
-        <p:spPr>
-          <a:xfrm>
-            <a:off x="4897878" y="2622905"/>
-            <a:ext cx="1464600" cy="274320"/>
-          </a:xfrm>
-          <a:prstGeom prst="rect">
-            <a:avLst/>
-          </a:prstGeom>
-          <a:solidFill>
-            <a:schemeClr val="accent5">
-              <a:lumMod val="20000"/>
-              <a:lumOff val="80000"/>
-            </a:schemeClr>
-          </a:solidFill>
-          <a:ln w="12700">
-            <a:solidFill>
-              <a:schemeClr val="tx1"/>
-            </a:solidFill>
-          </a:ln>
-        </p:spPr>
-        <p:style>
-          <a:lnRef idx="2">
-            <a:schemeClr val="accent6"/>
-          </a:lnRef>
-          <a:fillRef idx="1">
-            <a:schemeClr val="lt1"/>
-          </a:fillRef>
-          <a:effectRef idx="0">
-            <a:schemeClr val="accent6"/>
-          </a:effectRef>
-          <a:fontRef idx="minor">
-            <a:schemeClr val="dk1"/>
-          </a:fontRef>
-        </p:style>
-        <p:txBody>
-          <a:bodyPr rtlCol="0" anchor="ctr"/>
-          <a:lstStyle/>
-          <a:p>
-            <a:pPr algn="ctr"/>
-            <a:r>
-              <a:rPr lang="en-US" sz="900" b="1" i="1" dirty="0"/>
-              <a:t>Target</a:t>
-            </a:r>
-          </a:p>
-          <a:p>
-            <a:pPr algn="ctr"/>
-            <a:r>
-              <a:rPr lang="en-US" sz="900" dirty="0"/>
-              <a:t>Niño 1+2, Niño 3, Niño 3.4</a:t>
-            </a:r>
-            <a:endParaRPr lang="en-US" sz="900" dirty="0">
-              <a:cs typeface="Times New Roman" panose="02020603050405020304" pitchFamily="18" charset="0"/>
-            </a:endParaRPr>
-          </a:p>
-        </p:txBody>
-      </p:sp>
-      <p:cxnSp>
-        <p:nvCxnSpPr>
-          <p:cNvPr id="141" name="Straight Arrow Connector 123">
-            <a:extLst>
-              <a:ext uri="{FF2B5EF4-FFF2-40B4-BE49-F238E27FC236}">
-                <a16:creationId xmlns:a16="http://schemas.microsoft.com/office/drawing/2014/main" id="{6E2C2F88-9472-66AC-134B-207452ADFEB3}"/>
-              </a:ext>
-            </a:extLst>
-          </p:cNvPr>
-          <p:cNvCxnSpPr>
-            <a:cxnSpLocks/>
-            <a:stCxn id="17" idx="3"/>
-            <a:endCxn id="140" idx="0"/>
-          </p:cNvCxnSpPr>
-          <p:nvPr/>
-        </p:nvCxnSpPr>
-        <p:spPr>
-          <a:xfrm>
-            <a:off x="5201799" y="2251126"/>
-            <a:ext cx="428379" cy="371779"/>
-          </a:xfrm>
-          <a:prstGeom prst="bentConnector2">
-            <a:avLst/>
-          </a:prstGeom>
-          <a:ln w="15875">
-            <a:solidFill>
-              <a:schemeClr val="tx1"/>
-            </a:solidFill>
-            <a:tailEnd type="triangle"/>
-          </a:ln>
-        </p:spPr>
-        <p:style>
-          <a:lnRef idx="1">
-            <a:schemeClr val="accent1"/>
-          </a:lnRef>
-          <a:fillRef idx="0">
-            <a:schemeClr val="accent1"/>
-          </a:fillRef>
-          <a:effectRef idx="0">
-            <a:schemeClr val="accent1"/>
-          </a:effectRef>
-          <a:fontRef idx="minor">
-            <a:schemeClr val="tx1"/>
-          </a:fontRef>
-        </p:style>
-      </p:cxnSp>
-      <p:sp>
-        <p:nvSpPr>
-          <p:cNvPr id="156" name="Rectangle 155">
-            <a:extLst>
-              <a:ext uri="{FF2B5EF4-FFF2-40B4-BE49-F238E27FC236}">
-                <a16:creationId xmlns:a16="http://schemas.microsoft.com/office/drawing/2014/main" id="{D40829CC-B19C-DB00-218F-F67127472E8E}"/>
-              </a:ext>
-            </a:extLst>
-          </p:cNvPr>
-          <p:cNvSpPr/>
-          <p:nvPr/>
-        </p:nvSpPr>
-        <p:spPr>
-          <a:xfrm>
-            <a:off x="5264418" y="3173369"/>
-            <a:ext cx="731520" cy="191033"/>
-          </a:xfrm>
-          <a:prstGeom prst="rect">
-            <a:avLst/>
-          </a:prstGeom>
-          <a:solidFill>
-            <a:schemeClr val="accent5">
-              <a:lumMod val="20000"/>
-              <a:lumOff val="80000"/>
-            </a:schemeClr>
-          </a:solidFill>
-          <a:ln w="12700">
-            <a:solidFill>
-              <a:schemeClr val="tx1"/>
-            </a:solidFill>
-          </a:ln>
-        </p:spPr>
-        <p:style>
-          <a:lnRef idx="2">
-            <a:schemeClr val="accent6"/>
-          </a:lnRef>
-          <a:fillRef idx="1">
-            <a:schemeClr val="lt1"/>
-          </a:fillRef>
-          <a:effectRef idx="0">
-            <a:schemeClr val="accent6"/>
-          </a:effectRef>
-          <a:fontRef idx="minor">
-            <a:schemeClr val="dk1"/>
-          </a:fontRef>
-        </p:style>
-        <p:txBody>
-          <a:bodyPr rtlCol="0" anchor="ctr"/>
-          <a:lstStyle/>
-          <a:p>
-            <a:pPr algn="ctr"/>
-            <a:r>
-              <a:rPr lang="en-US" sz="900" dirty="0"/>
-              <a:t>RAW-DATA</a:t>
-            </a:r>
-            <a:endParaRPr lang="en-US" sz="900" dirty="0">
-              <a:cs typeface="Times New Roman" panose="02020603050405020304" pitchFamily="18" charset="0"/>
-            </a:endParaRPr>
-          </a:p>
-        </p:txBody>
-      </p:sp>
-      <p:cxnSp>
-        <p:nvCxnSpPr>
-          <p:cNvPr id="157" name="Straight Arrow Connector 37">
-            <a:extLst>
-              <a:ext uri="{FF2B5EF4-FFF2-40B4-BE49-F238E27FC236}">
-                <a16:creationId xmlns:a16="http://schemas.microsoft.com/office/drawing/2014/main" id="{81C8281E-60BF-5E39-3099-828F71D36D19}"/>
-              </a:ext>
-            </a:extLst>
-          </p:cNvPr>
-          <p:cNvCxnSpPr>
-            <a:cxnSpLocks/>
-            <a:stCxn id="140" idx="2"/>
-            <a:endCxn id="156" idx="0"/>
-          </p:cNvCxnSpPr>
-          <p:nvPr/>
-        </p:nvCxnSpPr>
-        <p:spPr>
-          <a:xfrm>
-            <a:off x="5630178" y="2897225"/>
-            <a:ext cx="0" cy="276144"/>
-          </a:xfrm>
-          <a:prstGeom prst="straightConnector1">
-            <a:avLst/>
-          </a:prstGeom>
-          <a:ln w="15875">
-            <a:solidFill>
-              <a:schemeClr val="tx1"/>
-            </a:solidFill>
-            <a:tailEnd type="triangle"/>
-          </a:ln>
-        </p:spPr>
-        <p:style>
-          <a:lnRef idx="1">
-            <a:schemeClr val="accent1"/>
-          </a:lnRef>
-          <a:fillRef idx="0">
-            <a:schemeClr val="accent1"/>
-          </a:fillRef>
-          <a:effectRef idx="0">
-            <a:schemeClr val="accent1"/>
-          </a:effectRef>
-          <a:fontRef idx="minor">
-            <a:schemeClr val="tx1"/>
-          </a:fontRef>
-        </p:style>
-      </p:cxnSp>
-      <p:cxnSp>
-        <p:nvCxnSpPr>
-          <p:cNvPr id="158" name="Straight Arrow Connector 37">
-            <a:extLst>
-              <a:ext uri="{FF2B5EF4-FFF2-40B4-BE49-F238E27FC236}">
-                <a16:creationId xmlns:a16="http://schemas.microsoft.com/office/drawing/2014/main" id="{BEE97EBD-8FDA-1431-856F-4282E58948EA}"/>
-              </a:ext>
-            </a:extLst>
-          </p:cNvPr>
-          <p:cNvCxnSpPr>
-            <a:cxnSpLocks/>
-            <a:stCxn id="156" idx="2"/>
-            <a:endCxn id="23" idx="3"/>
-          </p:cNvCxnSpPr>
-          <p:nvPr/>
-        </p:nvCxnSpPr>
-        <p:spPr>
-          <a:xfrm rot="5400000">
-            <a:off x="5165183" y="3401019"/>
-            <a:ext cx="501612" cy="428379"/>
-          </a:xfrm>
-          <a:prstGeom prst="bentConnector2">
-            <a:avLst/>
-          </a:prstGeom>
-          <a:ln w="15875">
-            <a:solidFill>
-              <a:schemeClr val="tx1"/>
-            </a:solidFill>
-            <a:tailEnd type="triangle"/>
-          </a:ln>
-        </p:spPr>
-        <p:style>
-          <a:lnRef idx="1">
-            <a:schemeClr val="accent1"/>
-          </a:lnRef>
-          <a:fillRef idx="0">
-            <a:schemeClr val="accent1"/>
-          </a:fillRef>
-          <a:effectRef idx="0">
-            <a:schemeClr val="accent1"/>
-          </a:effectRef>
-          <a:fontRef idx="minor">
-            <a:schemeClr val="tx1"/>
-          </a:fontRef>
-        </p:style>
-      </p:cxnSp>
-    </p:spTree>
-    <p:extLst>
-      <p:ext uri="{BB962C8B-B14F-4D97-AF65-F5344CB8AC3E}">
-        <p14:creationId xmlns:p14="http://schemas.microsoft.com/office/powerpoint/2010/main" val="1010973809"/>
-      </p:ext>
-    </p:extLst>
-  </p:cSld>
-  <p:clrMapOvr>
-    <a:masterClrMapping/>
-  </p:clrMapOvr>
-</p:sld>
-</file>
-
-<file path=ppt/slides/slide2.xml><?xml version="1.0" encoding="utf-8"?>
-<p:sld xmlns:a="http://schemas.openxmlformats.org/drawingml/2006/main" xmlns:r="http://schemas.openxmlformats.org/officeDocument/2006/relationships" xmlns:p="http://schemas.openxmlformats.org/presentationml/2006/main">
-  <p:cSld>
-    <p:spTree>
-      <p:nvGrpSpPr>
-        <p:cNvPr id="1" name="">
-          <a:extLst>
-            <a:ext uri="{FF2B5EF4-FFF2-40B4-BE49-F238E27FC236}">
-              <a16:creationId xmlns:a16="http://schemas.microsoft.com/office/drawing/2014/main" id="{F06999DF-122F-69C8-FBFC-E5E47A4F7FE7}"/>
-            </a:ext>
-          </a:extLst>
-        </p:cNvPr>
-        <p:cNvGrpSpPr/>
-        <p:nvPr/>
-      </p:nvGrpSpPr>
-      <p:grpSpPr>
-        <a:xfrm>
-          <a:off x="0" y="0"/>
-          <a:ext cx="0" cy="0"/>
-          <a:chOff x="0" y="0"/>
-          <a:chExt cx="0" cy="0"/>
-        </a:xfrm>
-      </p:grpSpPr>
-      <p:grpSp>
-        <p:nvGrpSpPr>
-          <p:cNvPr id="706" name="Group 705">
-            <a:extLst>
-              <a:ext uri="{FF2B5EF4-FFF2-40B4-BE49-F238E27FC236}">
-                <a16:creationId xmlns:a16="http://schemas.microsoft.com/office/drawing/2014/main" id="{6C54F5B7-0199-FB9D-657F-6AA06BE5B322}"/>
-              </a:ext>
-            </a:extLst>
-          </p:cNvPr>
-          <p:cNvGrpSpPr/>
-          <p:nvPr/>
-        </p:nvGrpSpPr>
-        <p:grpSpPr>
-          <a:xfrm>
-            <a:off x="1650825" y="552639"/>
-            <a:ext cx="5954711" cy="3868891"/>
-            <a:chOff x="1650825" y="552639"/>
-            <a:chExt cx="5954711" cy="3868891"/>
-          </a:xfrm>
-        </p:grpSpPr>
-        <p:sp>
-          <p:nvSpPr>
-            <p:cNvPr id="5" name="Rectangle 4">
-              <a:extLst>
-                <a:ext uri="{FF2B5EF4-FFF2-40B4-BE49-F238E27FC236}">
-                  <a16:creationId xmlns:a16="http://schemas.microsoft.com/office/drawing/2014/main" id="{D7038ECC-E667-1D7D-C5D9-A383F99FD9D8}"/>
-                </a:ext>
-              </a:extLst>
-            </p:cNvPr>
-            <p:cNvSpPr/>
-            <p:nvPr/>
-          </p:nvSpPr>
-          <p:spPr>
-            <a:xfrm>
-              <a:off x="6210405" y="552639"/>
-              <a:ext cx="1005840" cy="274320"/>
-            </a:xfrm>
-            <a:prstGeom prst="rect">
-              <a:avLst/>
-            </a:prstGeom>
-            <a:solidFill>
-              <a:schemeClr val="bg1">
-                <a:lumMod val="95000"/>
-              </a:schemeClr>
-            </a:solidFill>
-            <a:ln w="12700">
-              <a:solidFill>
-                <a:schemeClr val="tx1"/>
-              </a:solidFill>
-            </a:ln>
-          </p:spPr>
-          <p:style>
-            <a:lnRef idx="2">
-              <a:schemeClr val="accent6"/>
-            </a:lnRef>
-            <a:fillRef idx="1">
-              <a:schemeClr val="lt1"/>
-            </a:fillRef>
-            <a:effectRef idx="0">
-              <a:schemeClr val="accent6"/>
-            </a:effectRef>
-            <a:fontRef idx="minor">
-              <a:schemeClr val="dk1"/>
-            </a:fontRef>
-          </p:style>
-          <p:txBody>
-            <a:bodyPr rtlCol="0" anchor="ctr"/>
-            <a:lstStyle/>
-            <a:p>
-              <a:pPr algn="ctr"/>
-              <a:r>
-                <a:rPr lang="it-IT" sz="900" b="1" dirty="0">
-                  <a:cs typeface="Times New Roman" panose="02020603050405020304" pitchFamily="18" charset="0"/>
-                </a:rPr>
-                <a:t>Climate Datasets </a:t>
-              </a:r>
-            </a:p>
-            <a:p>
-              <a:pPr algn="ctr"/>
-              <a:r>
-                <a:rPr lang="it-IT" sz="900" b="1" dirty="0">
-                  <a:cs typeface="Times New Roman" panose="02020603050405020304" pitchFamily="18" charset="0"/>
-                </a:rPr>
-                <a:t>(1982–2022)</a:t>
-              </a:r>
-              <a:endParaRPr lang="en-US" sz="900" b="1" dirty="0">
-                <a:cs typeface="Times New Roman" panose="02020603050405020304" pitchFamily="18" charset="0"/>
-              </a:endParaRPr>
-            </a:p>
-          </p:txBody>
-        </p:sp>
-        <p:sp>
-          <p:nvSpPr>
-            <p:cNvPr id="7" name="Rectangle 6">
-              <a:extLst>
-                <a:ext uri="{FF2B5EF4-FFF2-40B4-BE49-F238E27FC236}">
-                  <a16:creationId xmlns:a16="http://schemas.microsoft.com/office/drawing/2014/main" id="{3CE2F899-05F8-4C3D-8FAD-9564268D62E9}"/>
-                </a:ext>
-              </a:extLst>
-            </p:cNvPr>
-            <p:cNvSpPr/>
-            <p:nvPr/>
-          </p:nvSpPr>
-          <p:spPr>
-            <a:xfrm>
-              <a:off x="4100083" y="552639"/>
-              <a:ext cx="822960" cy="274320"/>
-            </a:xfrm>
-            <a:prstGeom prst="rect">
-              <a:avLst/>
-            </a:prstGeom>
-            <a:noFill/>
-            <a:ln w="12700">
-              <a:solidFill>
-                <a:schemeClr val="tx1"/>
-              </a:solidFill>
-            </a:ln>
-          </p:spPr>
-          <p:style>
-            <a:lnRef idx="2">
-              <a:schemeClr val="accent6"/>
-            </a:lnRef>
-            <a:fillRef idx="1">
-              <a:schemeClr val="lt1"/>
-            </a:fillRef>
-            <a:effectRef idx="0">
-              <a:schemeClr val="accent6"/>
-            </a:effectRef>
-            <a:fontRef idx="minor">
-              <a:schemeClr val="dk1"/>
-            </a:fontRef>
-          </p:style>
-          <p:txBody>
-            <a:bodyPr rtlCol="0" anchor="ctr"/>
-            <a:lstStyle/>
-            <a:p>
-              <a:pPr algn="ctr"/>
-              <a:r>
-                <a:rPr lang="it-IT" sz="900" dirty="0">
-                  <a:cs typeface="Times New Roman" panose="02020603050405020304" pitchFamily="18" charset="0"/>
-                </a:rPr>
-                <a:t>Tmax | Tmin</a:t>
-              </a:r>
-            </a:p>
-            <a:p>
-              <a:pPr algn="ctr"/>
-              <a:r>
-                <a:rPr lang="it-IT" sz="900" i="1" dirty="0">
-                  <a:cs typeface="Times New Roman" panose="02020603050405020304" pitchFamily="18" charset="0"/>
-                </a:rPr>
-                <a:t>(From BMD)</a:t>
-              </a:r>
-              <a:endParaRPr lang="en-US" sz="900" i="1" dirty="0">
-                <a:cs typeface="Times New Roman" panose="02020603050405020304" pitchFamily="18" charset="0"/>
-              </a:endParaRPr>
-            </a:p>
-          </p:txBody>
-        </p:sp>
-        <p:sp>
-          <p:nvSpPr>
-            <p:cNvPr id="9" name="Rectangle 8">
-              <a:extLst>
-                <a:ext uri="{FF2B5EF4-FFF2-40B4-BE49-F238E27FC236}">
-                  <a16:creationId xmlns:a16="http://schemas.microsoft.com/office/drawing/2014/main" id="{A7877536-3CFF-197C-269B-F0398C684D32}"/>
-                </a:ext>
-              </a:extLst>
-            </p:cNvPr>
-            <p:cNvSpPr/>
-            <p:nvPr/>
-          </p:nvSpPr>
-          <p:spPr>
-            <a:xfrm>
-              <a:off x="2637043" y="943097"/>
-              <a:ext cx="2286000" cy="457200"/>
-            </a:xfrm>
-            <a:prstGeom prst="rect">
-              <a:avLst/>
-            </a:prstGeom>
-            <a:noFill/>
-            <a:ln w="12700">
-              <a:solidFill>
-                <a:schemeClr val="tx1"/>
-              </a:solidFill>
-            </a:ln>
-          </p:spPr>
-          <p:style>
-            <a:lnRef idx="2">
-              <a:schemeClr val="accent6"/>
-            </a:lnRef>
-            <a:fillRef idx="1">
-              <a:schemeClr val="lt1"/>
-            </a:fillRef>
-            <a:effectRef idx="0">
-              <a:schemeClr val="accent6"/>
-            </a:effectRef>
-            <a:fontRef idx="minor">
-              <a:schemeClr val="dk1"/>
-            </a:fontRef>
-          </p:style>
-          <p:txBody>
-            <a:bodyPr rtlCol="0" anchor="ctr"/>
-            <a:lstStyle/>
-            <a:p>
-              <a:pPr algn="ctr"/>
-              <a:r>
-                <a:rPr lang="en-US" sz="900" dirty="0"/>
-                <a:t>Precipitation Data</a:t>
-              </a:r>
-            </a:p>
-            <a:p>
-              <a:pPr algn="ctr"/>
-              <a:r>
-                <a:rPr lang="en-US" sz="900" dirty="0"/>
-                <a:t>(</a:t>
-              </a:r>
-              <a:r>
-                <a:rPr lang="en-US" sz="900" dirty="0" err="1"/>
-                <a:t>Prcptot</a:t>
-              </a:r>
-              <a:r>
-                <a:rPr lang="en-US" sz="900" dirty="0"/>
-                <a:t>, R10mm, R20mm, Rx1day, Rx5day)</a:t>
-              </a:r>
-            </a:p>
-            <a:p>
-              <a:pPr algn="ctr"/>
-              <a:r>
-                <a:rPr lang="it-IT" sz="900" i="1" dirty="0">
-                  <a:cs typeface="Times New Roman" panose="02020603050405020304" pitchFamily="18" charset="0"/>
-                </a:rPr>
-                <a:t>(From ETCCDI)</a:t>
-              </a:r>
-              <a:endParaRPr lang="en-US" sz="900" i="1" dirty="0">
-                <a:cs typeface="Times New Roman" panose="02020603050405020304" pitchFamily="18" charset="0"/>
-              </a:endParaRPr>
-            </a:p>
-          </p:txBody>
-        </p:sp>
-        <p:sp>
-          <p:nvSpPr>
-            <p:cNvPr id="11" name="Rectangle 10">
-              <a:extLst>
-                <a:ext uri="{FF2B5EF4-FFF2-40B4-BE49-F238E27FC236}">
-                  <a16:creationId xmlns:a16="http://schemas.microsoft.com/office/drawing/2014/main" id="{7BF75DA4-C5AA-53F1-55F2-BDF2723D2E1A}"/>
-                </a:ext>
-              </a:extLst>
-            </p:cNvPr>
-            <p:cNvSpPr/>
-            <p:nvPr/>
-          </p:nvSpPr>
-          <p:spPr>
-            <a:xfrm>
-              <a:off x="4572523" y="1541892"/>
-              <a:ext cx="1554480" cy="457200"/>
-            </a:xfrm>
-            <a:prstGeom prst="rect">
-              <a:avLst/>
-            </a:prstGeom>
-            <a:noFill/>
-            <a:ln w="12700">
-              <a:solidFill>
-                <a:schemeClr val="tx1"/>
-              </a:solidFill>
-            </a:ln>
-          </p:spPr>
-          <p:style>
-            <a:lnRef idx="2">
-              <a:schemeClr val="accent6"/>
-            </a:lnRef>
-            <a:fillRef idx="1">
-              <a:schemeClr val="lt1"/>
-            </a:fillRef>
-            <a:effectRef idx="0">
-              <a:schemeClr val="accent6"/>
-            </a:effectRef>
-            <a:fontRef idx="minor">
-              <a:schemeClr val="dk1"/>
-            </a:fontRef>
-          </p:style>
-          <p:txBody>
-            <a:bodyPr rtlCol="0" anchor="ctr"/>
-            <a:lstStyle/>
-            <a:p>
-              <a:pPr algn="ctr"/>
-              <a:r>
-                <a:rPr lang="en-US" sz="900" dirty="0"/>
-                <a:t>ENSO SST Data </a:t>
-              </a:r>
-            </a:p>
-            <a:p>
-              <a:pPr algn="ctr"/>
-              <a:r>
-                <a:rPr lang="en-US" sz="900" dirty="0"/>
-                <a:t>(Niño 1+2, Niño 3, Niño 3.4)</a:t>
-              </a:r>
-            </a:p>
-            <a:p>
-              <a:pPr algn="ctr"/>
-              <a:r>
-                <a:rPr lang="it-IT" sz="900" i="1" dirty="0">
-                  <a:cs typeface="Times New Roman" panose="02020603050405020304" pitchFamily="18" charset="0"/>
-                </a:rPr>
-                <a:t>(From </a:t>
-              </a:r>
-              <a:r>
-                <a:rPr lang="en-US" sz="900" i="1" dirty="0">
-                  <a:cs typeface="Times New Roman" panose="02020603050405020304" pitchFamily="18" charset="0"/>
-                </a:rPr>
-                <a:t>NOAA PSL</a:t>
-              </a:r>
-              <a:r>
-                <a:rPr lang="it-IT" sz="900" i="1" dirty="0">
-                  <a:cs typeface="Times New Roman" panose="02020603050405020304" pitchFamily="18" charset="0"/>
-                </a:rPr>
-                <a:t>)</a:t>
-              </a:r>
-              <a:endParaRPr lang="en-US" sz="900" i="1" dirty="0">
-                <a:cs typeface="Times New Roman" panose="02020603050405020304" pitchFamily="18" charset="0"/>
-              </a:endParaRPr>
-            </a:p>
-          </p:txBody>
-        </p:sp>
-        <p:sp>
-          <p:nvSpPr>
-            <p:cNvPr id="13" name="Rectangle 12">
-              <a:extLst>
-                <a:ext uri="{FF2B5EF4-FFF2-40B4-BE49-F238E27FC236}">
-                  <a16:creationId xmlns:a16="http://schemas.microsoft.com/office/drawing/2014/main" id="{8AF1B228-9C47-76A1-C0E8-CFC5F3696D47}"/>
-                </a:ext>
-              </a:extLst>
-            </p:cNvPr>
-            <p:cNvSpPr/>
-            <p:nvPr/>
-          </p:nvSpPr>
-          <p:spPr>
-            <a:xfrm>
-              <a:off x="2702384" y="552639"/>
-              <a:ext cx="1097280" cy="274320"/>
-            </a:xfrm>
-            <a:prstGeom prst="rect">
-              <a:avLst/>
-            </a:prstGeom>
-            <a:noFill/>
-            <a:ln w="12700">
-              <a:solidFill>
-                <a:schemeClr val="tx1"/>
-              </a:solidFill>
-            </a:ln>
-          </p:spPr>
-          <p:style>
-            <a:lnRef idx="2">
-              <a:schemeClr val="accent6"/>
-            </a:lnRef>
-            <a:fillRef idx="1">
-              <a:schemeClr val="lt1"/>
-            </a:fillRef>
-            <a:effectRef idx="0">
-              <a:schemeClr val="accent6"/>
-            </a:effectRef>
-            <a:fontRef idx="minor">
-              <a:schemeClr val="dk1"/>
-            </a:fontRef>
-          </p:style>
-          <p:txBody>
-            <a:bodyPr rtlCol="0" anchor="ctr"/>
-            <a:lstStyle/>
-            <a:p>
-              <a:pPr algn="ctr"/>
-              <a:r>
-                <a:rPr lang="en-US" sz="900" dirty="0"/>
-                <a:t>Quality control and KNN imputation</a:t>
-              </a:r>
-              <a:endParaRPr lang="en-US" sz="900" dirty="0">
-                <a:cs typeface="Times New Roman" panose="02020603050405020304" pitchFamily="18" charset="0"/>
-              </a:endParaRPr>
-            </a:p>
-          </p:txBody>
-        </p:sp>
-        <p:sp>
-          <p:nvSpPr>
-            <p:cNvPr id="15" name="Rectangle 14">
-              <a:extLst>
-                <a:ext uri="{FF2B5EF4-FFF2-40B4-BE49-F238E27FC236}">
-                  <a16:creationId xmlns:a16="http://schemas.microsoft.com/office/drawing/2014/main" id="{5DE15885-AD04-DC26-E69E-9229640CF6D6}"/>
-                </a:ext>
-              </a:extLst>
-            </p:cNvPr>
-            <p:cNvSpPr/>
-            <p:nvPr/>
-          </p:nvSpPr>
-          <p:spPr>
-            <a:xfrm>
-              <a:off x="1650825" y="1636849"/>
-              <a:ext cx="1463040" cy="274320"/>
-            </a:xfrm>
-            <a:prstGeom prst="rect">
-              <a:avLst/>
-            </a:prstGeom>
-            <a:noFill/>
-            <a:ln w="12700">
-              <a:solidFill>
-                <a:schemeClr val="tx1"/>
-              </a:solidFill>
-            </a:ln>
-          </p:spPr>
-          <p:style>
-            <a:lnRef idx="2">
-              <a:schemeClr val="accent6"/>
-            </a:lnRef>
-            <a:fillRef idx="1">
-              <a:schemeClr val="lt1"/>
-            </a:fillRef>
-            <a:effectRef idx="0">
-              <a:schemeClr val="accent6"/>
-            </a:effectRef>
-            <a:fontRef idx="minor">
-              <a:schemeClr val="dk1"/>
-            </a:fontRef>
-          </p:style>
-          <p:txBody>
-            <a:bodyPr rtlCol="0" anchor="ctr"/>
-            <a:lstStyle/>
-            <a:p>
-              <a:pPr algn="ctr"/>
-              <a:r>
-                <a:rPr lang="en-US" sz="900" dirty="0"/>
-                <a:t>STATISTICAL ASSOCIATION</a:t>
-              </a:r>
-            </a:p>
-            <a:p>
-              <a:pPr algn="ctr"/>
-              <a:r>
-                <a:rPr lang="en-US" sz="900" dirty="0"/>
-                <a:t>(Pearson correlation)</a:t>
-              </a:r>
-              <a:endParaRPr lang="en-US" sz="900" dirty="0">
-                <a:cs typeface="Times New Roman" panose="02020603050405020304" pitchFamily="18" charset="0"/>
-              </a:endParaRPr>
-            </a:p>
-          </p:txBody>
-        </p:sp>
-        <p:sp>
-          <p:nvSpPr>
-            <p:cNvPr id="17" name="Rectangle 16">
-              <a:extLst>
-                <a:ext uri="{FF2B5EF4-FFF2-40B4-BE49-F238E27FC236}">
-                  <a16:creationId xmlns:a16="http://schemas.microsoft.com/office/drawing/2014/main" id="{66595124-4E1D-3F46-C9C0-BFE2F99A13B6}"/>
-                </a:ext>
-              </a:extLst>
-            </p:cNvPr>
-            <p:cNvSpPr/>
-            <p:nvPr/>
-          </p:nvSpPr>
-          <p:spPr>
-            <a:xfrm>
-              <a:off x="1656886" y="2273771"/>
-              <a:ext cx="1450919" cy="191033"/>
-            </a:xfrm>
-            <a:prstGeom prst="rect">
-              <a:avLst/>
-            </a:prstGeom>
-            <a:noFill/>
-            <a:ln w="12700">
-              <a:solidFill>
-                <a:schemeClr val="tx1"/>
-              </a:solidFill>
-            </a:ln>
-          </p:spPr>
-          <p:style>
-            <a:lnRef idx="2">
-              <a:schemeClr val="accent6"/>
-            </a:lnRef>
-            <a:fillRef idx="1">
-              <a:schemeClr val="lt1"/>
-            </a:fillRef>
-            <a:effectRef idx="0">
-              <a:schemeClr val="accent6"/>
-            </a:effectRef>
-            <a:fontRef idx="minor">
-              <a:schemeClr val="dk1"/>
-            </a:fontRef>
-          </p:style>
-          <p:txBody>
-            <a:bodyPr rtlCol="0" anchor="ctr"/>
-            <a:lstStyle/>
-            <a:p>
-              <a:pPr algn="ctr"/>
-              <a:r>
-                <a:rPr lang="en-US" sz="900" dirty="0"/>
-                <a:t>PREDICTIVE MODELLING</a:t>
-              </a:r>
-              <a:endParaRPr lang="en-US" sz="900" dirty="0">
-                <a:cs typeface="Times New Roman" panose="02020603050405020304" pitchFamily="18" charset="0"/>
-              </a:endParaRPr>
-            </a:p>
-          </p:txBody>
-        </p:sp>
-        <p:sp>
-          <p:nvSpPr>
-            <p:cNvPr id="19" name="Rectangle 18">
-              <a:extLst>
-                <a:ext uri="{FF2B5EF4-FFF2-40B4-BE49-F238E27FC236}">
-                  <a16:creationId xmlns:a16="http://schemas.microsoft.com/office/drawing/2014/main" id="{4E4BAF80-6F29-F0E6-7538-3509BD27A055}"/>
-                </a:ext>
-              </a:extLst>
-            </p:cNvPr>
-            <p:cNvSpPr/>
-            <p:nvPr/>
-          </p:nvSpPr>
-          <p:spPr>
-            <a:xfrm>
-              <a:off x="4679458" y="2753090"/>
-              <a:ext cx="731520" cy="191033"/>
-            </a:xfrm>
-            <a:prstGeom prst="rect">
-              <a:avLst/>
-            </a:prstGeom>
-            <a:noFill/>
-            <a:ln w="12700">
-              <a:solidFill>
-                <a:schemeClr val="tx1"/>
-              </a:solidFill>
-            </a:ln>
-          </p:spPr>
-          <p:style>
-            <a:lnRef idx="2">
-              <a:schemeClr val="accent6"/>
-            </a:lnRef>
-            <a:fillRef idx="1">
-              <a:schemeClr val="lt1"/>
-            </a:fillRef>
-            <a:effectRef idx="0">
-              <a:schemeClr val="accent6"/>
-            </a:effectRef>
-            <a:fontRef idx="minor">
-              <a:schemeClr val="dk1"/>
-            </a:fontRef>
-          </p:style>
-          <p:txBody>
-            <a:bodyPr rtlCol="0" anchor="ctr"/>
-            <a:lstStyle/>
-            <a:p>
-              <a:pPr algn="ctr"/>
-              <a:r>
-                <a:rPr lang="en-US" sz="900" dirty="0"/>
-                <a:t>Raw Data</a:t>
-              </a:r>
-              <a:endParaRPr lang="en-US" sz="900" dirty="0">
-                <a:cs typeface="Times New Roman" panose="02020603050405020304" pitchFamily="18" charset="0"/>
-              </a:endParaRPr>
-            </a:p>
-          </p:txBody>
-        </p:sp>
-        <p:sp>
-          <p:nvSpPr>
-            <p:cNvPr id="21" name="Rectangle 20">
-              <a:extLst>
-                <a:ext uri="{FF2B5EF4-FFF2-40B4-BE49-F238E27FC236}">
-                  <a16:creationId xmlns:a16="http://schemas.microsoft.com/office/drawing/2014/main" id="{7C3BE73B-3FA1-63B6-ED71-C3B6FA02553F}"/>
-                </a:ext>
-              </a:extLst>
-            </p:cNvPr>
-            <p:cNvSpPr/>
-            <p:nvPr/>
-          </p:nvSpPr>
-          <p:spPr>
-            <a:xfrm>
-              <a:off x="1650825" y="3420631"/>
-              <a:ext cx="1463040" cy="289561"/>
-            </a:xfrm>
-            <a:prstGeom prst="rect">
-              <a:avLst/>
-            </a:prstGeom>
-            <a:noFill/>
-            <a:ln w="12700">
-              <a:solidFill>
-                <a:schemeClr val="tx1"/>
-              </a:solidFill>
-            </a:ln>
-          </p:spPr>
-          <p:style>
-            <a:lnRef idx="2">
-              <a:schemeClr val="accent6"/>
-            </a:lnRef>
-            <a:fillRef idx="1">
-              <a:schemeClr val="lt1"/>
-            </a:fillRef>
-            <a:effectRef idx="0">
-              <a:schemeClr val="accent6"/>
-            </a:effectRef>
-            <a:fontRef idx="minor">
-              <a:schemeClr val="dk1"/>
-            </a:fontRef>
-          </p:style>
-          <p:txBody>
-            <a:bodyPr rtlCol="0" anchor="ctr"/>
-            <a:lstStyle/>
-            <a:p>
-              <a:pPr algn="ctr"/>
-              <a:r>
-                <a:rPr lang="en-US" sz="900" dirty="0"/>
-                <a:t>Wavelet Decomposition</a:t>
-              </a:r>
-            </a:p>
-            <a:p>
-              <a:pPr algn="ctr"/>
-              <a:r>
-                <a:rPr lang="en-US" sz="900" b="1" dirty="0"/>
-                <a:t>Coif3 | Db4 | Haar | TQWT</a:t>
-              </a:r>
-              <a:endParaRPr lang="en-US" sz="900" dirty="0">
-                <a:cs typeface="Times New Roman" panose="02020603050405020304" pitchFamily="18" charset="0"/>
-              </a:endParaRPr>
-            </a:p>
-          </p:txBody>
-        </p:sp>
-        <p:sp>
-          <p:nvSpPr>
-            <p:cNvPr id="23" name="Rectangle 22">
-              <a:extLst>
-                <a:ext uri="{FF2B5EF4-FFF2-40B4-BE49-F238E27FC236}">
-                  <a16:creationId xmlns:a16="http://schemas.microsoft.com/office/drawing/2014/main" id="{D728279F-7695-C37A-48AD-79080EFF6C25}"/>
-                </a:ext>
-              </a:extLst>
-            </p:cNvPr>
-            <p:cNvSpPr/>
-            <p:nvPr/>
-          </p:nvSpPr>
-          <p:spPr>
-            <a:xfrm>
-              <a:off x="4496577" y="3153961"/>
-              <a:ext cx="1097280" cy="289561"/>
-            </a:xfrm>
-            <a:prstGeom prst="rect">
-              <a:avLst/>
-            </a:prstGeom>
-            <a:noFill/>
-            <a:ln w="12700">
-              <a:solidFill>
-                <a:schemeClr val="tx1"/>
-              </a:solidFill>
-            </a:ln>
-          </p:spPr>
-          <p:style>
-            <a:lnRef idx="2">
-              <a:schemeClr val="accent6"/>
-            </a:lnRef>
-            <a:fillRef idx="1">
-              <a:schemeClr val="lt1"/>
-            </a:fillRef>
-            <a:effectRef idx="0">
-              <a:schemeClr val="accent6"/>
-            </a:effectRef>
-            <a:fontRef idx="minor">
-              <a:schemeClr val="dk1"/>
-            </a:fontRef>
-          </p:style>
-          <p:txBody>
-            <a:bodyPr rtlCol="0" anchor="ctr"/>
-            <a:lstStyle/>
-            <a:p>
-              <a:pPr algn="ctr"/>
-              <a:r>
-                <a:rPr lang="en-US" sz="900" dirty="0"/>
-                <a:t>MLA analysis</a:t>
-              </a:r>
-            </a:p>
-            <a:p>
-              <a:pPr algn="ctr"/>
-              <a:r>
-                <a:rPr lang="en-US" sz="900" b="1" dirty="0"/>
-                <a:t>LGBM | XGB | RF</a:t>
-              </a:r>
-              <a:endParaRPr lang="en-US" sz="900" b="1" dirty="0">
-                <a:cs typeface="Times New Roman" panose="02020603050405020304" pitchFamily="18" charset="0"/>
-              </a:endParaRPr>
-            </a:p>
-          </p:txBody>
-        </p:sp>
-        <p:sp>
-          <p:nvSpPr>
-            <p:cNvPr id="25" name="Rectangle 24">
-              <a:extLst>
-                <a:ext uri="{FF2B5EF4-FFF2-40B4-BE49-F238E27FC236}">
-                  <a16:creationId xmlns:a16="http://schemas.microsoft.com/office/drawing/2014/main" id="{40CB04D3-02D3-AC72-BF5E-E5A091B86B16}"/>
-                </a:ext>
-              </a:extLst>
-            </p:cNvPr>
-            <p:cNvSpPr/>
-            <p:nvPr/>
-          </p:nvSpPr>
-          <p:spPr>
-            <a:xfrm>
-              <a:off x="6142496" y="2719621"/>
-              <a:ext cx="1463040" cy="274320"/>
-            </a:xfrm>
-            <a:prstGeom prst="rect">
-              <a:avLst/>
-            </a:prstGeom>
-            <a:noFill/>
-            <a:ln w="12700">
-              <a:solidFill>
-                <a:schemeClr val="tx1"/>
-              </a:solidFill>
-              <a:prstDash val="dash"/>
-            </a:ln>
-          </p:spPr>
-          <p:style>
-            <a:lnRef idx="2">
-              <a:schemeClr val="accent6"/>
-            </a:lnRef>
-            <a:fillRef idx="1">
-              <a:schemeClr val="lt1"/>
-            </a:fillRef>
-            <a:effectRef idx="0">
-              <a:schemeClr val="accent6"/>
-            </a:effectRef>
-            <a:fontRef idx="minor">
-              <a:schemeClr val="dk1"/>
-            </a:fontRef>
-          </p:style>
-          <p:txBody>
-            <a:bodyPr rtlCol="0" anchor="ctr"/>
-            <a:lstStyle/>
-            <a:p>
-              <a:pPr algn="ctr"/>
-              <a:r>
-                <a:rPr lang="en-US" sz="900" dirty="0"/>
-                <a:t>RAW-DATA PERFORMANCE EVALUATION</a:t>
-              </a:r>
-              <a:endParaRPr lang="en-US" sz="900" dirty="0">
-                <a:cs typeface="Times New Roman" panose="02020603050405020304" pitchFamily="18" charset="0"/>
-              </a:endParaRPr>
-            </a:p>
-          </p:txBody>
-        </p:sp>
-        <p:sp>
-          <p:nvSpPr>
-            <p:cNvPr id="27" name="Rectangle 26">
-              <a:extLst>
-                <a:ext uri="{FF2B5EF4-FFF2-40B4-BE49-F238E27FC236}">
-                  <a16:creationId xmlns:a16="http://schemas.microsoft.com/office/drawing/2014/main" id="{26EDE89C-E494-8AB8-88C4-D77B052C0A9B}"/>
-                </a:ext>
-              </a:extLst>
-            </p:cNvPr>
-            <p:cNvSpPr/>
-            <p:nvPr/>
-          </p:nvSpPr>
-          <p:spPr>
-            <a:xfrm>
-              <a:off x="6233935" y="3169202"/>
-              <a:ext cx="1280160" cy="274320"/>
-            </a:xfrm>
-            <a:prstGeom prst="rect">
-              <a:avLst/>
-            </a:prstGeom>
-            <a:noFill/>
-            <a:ln w="12700">
-              <a:solidFill>
-                <a:schemeClr val="tx1"/>
-              </a:solidFill>
-              <a:prstDash val="dash"/>
-            </a:ln>
-          </p:spPr>
-          <p:style>
-            <a:lnRef idx="2">
-              <a:schemeClr val="accent6"/>
-            </a:lnRef>
-            <a:fillRef idx="1">
-              <a:schemeClr val="lt1"/>
-            </a:fillRef>
-            <a:effectRef idx="0">
-              <a:schemeClr val="accent6"/>
-            </a:effectRef>
-            <a:fontRef idx="minor">
-              <a:schemeClr val="dk1"/>
-            </a:fontRef>
-          </p:style>
-          <p:txBody>
-            <a:bodyPr rtlCol="0" anchor="ctr"/>
-            <a:lstStyle/>
-            <a:p>
-              <a:pPr algn="ctr"/>
-              <a:r>
-                <a:rPr lang="en-US" sz="900" dirty="0"/>
-                <a:t>RAW vs. DECOMPOSED COMPARISON</a:t>
-              </a:r>
-              <a:endParaRPr lang="en-US" sz="900" dirty="0">
-                <a:cs typeface="Times New Roman" panose="02020603050405020304" pitchFamily="18" charset="0"/>
-              </a:endParaRPr>
-            </a:p>
-          </p:txBody>
-        </p:sp>
-        <p:sp>
-          <p:nvSpPr>
-            <p:cNvPr id="29" name="Rectangle 28">
-              <a:extLst>
-                <a:ext uri="{FF2B5EF4-FFF2-40B4-BE49-F238E27FC236}">
-                  <a16:creationId xmlns:a16="http://schemas.microsoft.com/office/drawing/2014/main" id="{5D20C00C-3672-63FF-DD1A-1A9CAB1A55E1}"/>
-                </a:ext>
-              </a:extLst>
-            </p:cNvPr>
-            <p:cNvSpPr/>
-            <p:nvPr/>
-          </p:nvSpPr>
-          <p:spPr>
-            <a:xfrm>
-              <a:off x="4039377" y="3642965"/>
-              <a:ext cx="2011680" cy="289561"/>
-            </a:xfrm>
-            <a:prstGeom prst="rect">
-              <a:avLst/>
-            </a:prstGeom>
-            <a:solidFill>
-              <a:schemeClr val="bg1">
-                <a:lumMod val="85000"/>
-              </a:schemeClr>
-            </a:solidFill>
-            <a:ln w="12700">
-              <a:solidFill>
-                <a:schemeClr val="tx1"/>
-              </a:solidFill>
-            </a:ln>
-          </p:spPr>
-          <p:style>
-            <a:lnRef idx="2">
-              <a:schemeClr val="accent6"/>
-            </a:lnRef>
-            <a:fillRef idx="1">
-              <a:schemeClr val="lt1"/>
-            </a:fillRef>
-            <a:effectRef idx="0">
-              <a:schemeClr val="accent6"/>
-            </a:effectRef>
-            <a:fontRef idx="minor">
-              <a:schemeClr val="dk1"/>
-            </a:fontRef>
-          </p:style>
-          <p:txBody>
-            <a:bodyPr rtlCol="0" anchor="ctr"/>
-            <a:lstStyle/>
-            <a:p>
-              <a:pPr algn="ctr"/>
-              <a:r>
-                <a:rPr lang="en-US" sz="900" dirty="0"/>
-                <a:t>DECOMPOSED-MODEL PERFORMANCE</a:t>
-              </a:r>
-            </a:p>
-            <a:p>
-              <a:pPr algn="ctr"/>
-              <a:r>
-                <a:rPr lang="en-US" sz="900" dirty="0"/>
-                <a:t>EVALUATION</a:t>
-              </a:r>
-              <a:endParaRPr lang="en-US" sz="900" dirty="0">
-                <a:cs typeface="Times New Roman" panose="02020603050405020304" pitchFamily="18" charset="0"/>
-              </a:endParaRPr>
-            </a:p>
-          </p:txBody>
-        </p:sp>
-        <p:sp>
-          <p:nvSpPr>
-            <p:cNvPr id="31" name="Rectangle 30">
-              <a:extLst>
-                <a:ext uri="{FF2B5EF4-FFF2-40B4-BE49-F238E27FC236}">
-                  <a16:creationId xmlns:a16="http://schemas.microsoft.com/office/drawing/2014/main" id="{86E419FE-89F6-95D7-599D-88A04DF8C0B6}"/>
-                </a:ext>
-              </a:extLst>
-            </p:cNvPr>
-            <p:cNvSpPr/>
-            <p:nvPr/>
-          </p:nvSpPr>
-          <p:spPr>
-            <a:xfrm>
-              <a:off x="4450857" y="4131969"/>
-              <a:ext cx="1188720" cy="289561"/>
-            </a:xfrm>
-            <a:prstGeom prst="rect">
-              <a:avLst/>
-            </a:prstGeom>
-            <a:solidFill>
-              <a:schemeClr val="bg1">
-                <a:lumMod val="85000"/>
-              </a:schemeClr>
-            </a:solidFill>
-            <a:ln w="12700">
-              <a:solidFill>
-                <a:schemeClr val="tx1"/>
-              </a:solidFill>
-            </a:ln>
-          </p:spPr>
-          <p:style>
-            <a:lnRef idx="2">
-              <a:schemeClr val="accent6"/>
-            </a:lnRef>
-            <a:fillRef idx="1">
-              <a:schemeClr val="lt1"/>
-            </a:fillRef>
-            <a:effectRef idx="0">
-              <a:schemeClr val="accent6"/>
-            </a:effectRef>
-            <a:fontRef idx="minor">
-              <a:schemeClr val="dk1"/>
-            </a:fontRef>
-          </p:style>
-          <p:txBody>
-            <a:bodyPr rtlCol="0" anchor="ctr"/>
-            <a:lstStyle/>
-            <a:p>
-              <a:pPr algn="ctr"/>
-              <a:r>
-                <a:rPr lang="en-US" sz="900" dirty="0"/>
-                <a:t>FINAL COMPARATIVE ANALYSIS</a:t>
-              </a:r>
-              <a:endParaRPr lang="en-US" sz="900" dirty="0">
-                <a:cs typeface="Times New Roman" panose="02020603050405020304" pitchFamily="18" charset="0"/>
-              </a:endParaRPr>
-            </a:p>
-          </p:txBody>
-        </p:sp>
-        <p:cxnSp>
-          <p:nvCxnSpPr>
-            <p:cNvPr id="36" name="Straight Arrow Connector 35">
-              <a:extLst>
-                <a:ext uri="{FF2B5EF4-FFF2-40B4-BE49-F238E27FC236}">
-                  <a16:creationId xmlns:a16="http://schemas.microsoft.com/office/drawing/2014/main" id="{EC221807-4B30-9643-E9CD-6BA8B4E774F5}"/>
-                </a:ext>
-              </a:extLst>
-            </p:cNvPr>
-            <p:cNvCxnSpPr>
-              <a:cxnSpLocks/>
-              <a:stCxn id="5" idx="1"/>
-              <a:endCxn id="9" idx="3"/>
-            </p:cNvCxnSpPr>
-            <p:nvPr/>
-          </p:nvCxnSpPr>
-          <p:spPr>
-            <a:xfrm rot="10800000" flipV="1">
-              <a:off x="4923043" y="689799"/>
-              <a:ext cx="1287362" cy="481898"/>
-            </a:xfrm>
-            <a:prstGeom prst="bentConnector3">
-              <a:avLst>
-                <a:gd name="adj1" fmla="val 50000"/>
-              </a:avLst>
-            </a:prstGeom>
-            <a:ln w="15875">
-              <a:solidFill>
-                <a:schemeClr val="tx1"/>
-              </a:solidFill>
-              <a:tailEnd type="triangle"/>
-            </a:ln>
-          </p:spPr>
-          <p:style>
-            <a:lnRef idx="1">
-              <a:schemeClr val="accent1"/>
-            </a:lnRef>
-            <a:fillRef idx="0">
-              <a:schemeClr val="accent1"/>
-            </a:fillRef>
-            <a:effectRef idx="0">
-              <a:schemeClr val="accent1"/>
-            </a:effectRef>
-            <a:fontRef idx="minor">
-              <a:schemeClr val="tx1"/>
-            </a:fontRef>
-          </p:style>
-        </p:cxnSp>
-        <p:cxnSp>
-          <p:nvCxnSpPr>
-            <p:cNvPr id="38" name="Straight Arrow Connector 37">
-              <a:extLst>
-                <a:ext uri="{FF2B5EF4-FFF2-40B4-BE49-F238E27FC236}">
-                  <a16:creationId xmlns:a16="http://schemas.microsoft.com/office/drawing/2014/main" id="{1B72DE6B-98A0-E8F9-B9C4-1CB195B92D3E}"/>
-                </a:ext>
-              </a:extLst>
-            </p:cNvPr>
-            <p:cNvCxnSpPr>
-              <a:cxnSpLocks/>
-              <a:stCxn id="5" idx="2"/>
-              <a:endCxn id="11" idx="3"/>
-            </p:cNvCxnSpPr>
-            <p:nvPr/>
-          </p:nvCxnSpPr>
-          <p:spPr>
-            <a:xfrm rot="5400000">
-              <a:off x="5948398" y="1005564"/>
-              <a:ext cx="943533" cy="586322"/>
-            </a:xfrm>
-            <a:prstGeom prst="bentConnector2">
-              <a:avLst/>
-            </a:prstGeom>
-            <a:ln w="15875">
-              <a:solidFill>
-                <a:schemeClr val="tx1"/>
-              </a:solidFill>
-              <a:tailEnd type="triangle"/>
-            </a:ln>
-          </p:spPr>
-          <p:style>
-            <a:lnRef idx="1">
-              <a:schemeClr val="accent1"/>
-            </a:lnRef>
-            <a:fillRef idx="0">
-              <a:schemeClr val="accent1"/>
-            </a:fillRef>
-            <a:effectRef idx="0">
-              <a:schemeClr val="accent1"/>
-            </a:effectRef>
-            <a:fontRef idx="minor">
-              <a:schemeClr val="tx1"/>
-            </a:fontRef>
-          </p:style>
-        </p:cxnSp>
-        <p:cxnSp>
-          <p:nvCxnSpPr>
-            <p:cNvPr id="41" name="Straight Arrow Connector 37">
-              <a:extLst>
-                <a:ext uri="{FF2B5EF4-FFF2-40B4-BE49-F238E27FC236}">
-                  <a16:creationId xmlns:a16="http://schemas.microsoft.com/office/drawing/2014/main" id="{02A06E36-FDBA-22FA-FF43-98266DE7E45D}"/>
-                </a:ext>
-              </a:extLst>
-            </p:cNvPr>
-            <p:cNvCxnSpPr>
-              <a:cxnSpLocks/>
-              <a:stCxn id="5" idx="1"/>
-              <a:endCxn id="7" idx="3"/>
-            </p:cNvCxnSpPr>
-            <p:nvPr/>
-          </p:nvCxnSpPr>
-          <p:spPr>
-            <a:xfrm flipH="1">
-              <a:off x="4923043" y="689799"/>
-              <a:ext cx="1287362" cy="0"/>
-            </a:xfrm>
-            <a:prstGeom prst="straightConnector1">
-              <a:avLst/>
-            </a:prstGeom>
-            <a:ln w="15875">
-              <a:solidFill>
-                <a:schemeClr val="tx1"/>
-              </a:solidFill>
-              <a:tailEnd type="triangle"/>
-            </a:ln>
-          </p:spPr>
-          <p:style>
-            <a:lnRef idx="1">
-              <a:schemeClr val="accent1"/>
-            </a:lnRef>
-            <a:fillRef idx="0">
-              <a:schemeClr val="accent1"/>
-            </a:fillRef>
-            <a:effectRef idx="0">
-              <a:schemeClr val="accent1"/>
-            </a:effectRef>
-            <a:fontRef idx="minor">
-              <a:schemeClr val="tx1"/>
-            </a:fontRef>
-          </p:style>
-        </p:cxnSp>
-        <p:cxnSp>
-          <p:nvCxnSpPr>
-            <p:cNvPr id="50" name="Straight Arrow Connector 49">
-              <a:extLst>
-                <a:ext uri="{FF2B5EF4-FFF2-40B4-BE49-F238E27FC236}">
-                  <a16:creationId xmlns:a16="http://schemas.microsoft.com/office/drawing/2014/main" id="{17A641BD-9596-F49F-2D72-091AF39094A6}"/>
-                </a:ext>
-              </a:extLst>
-            </p:cNvPr>
-            <p:cNvCxnSpPr>
-              <a:cxnSpLocks/>
-              <a:stCxn id="7" idx="1"/>
-              <a:endCxn id="13" idx="3"/>
-            </p:cNvCxnSpPr>
-            <p:nvPr/>
-          </p:nvCxnSpPr>
-          <p:spPr>
-            <a:xfrm flipH="1">
-              <a:off x="3799664" y="689799"/>
-              <a:ext cx="300419" cy="0"/>
-            </a:xfrm>
-            <a:prstGeom prst="straightConnector1">
-              <a:avLst/>
-            </a:prstGeom>
-            <a:ln w="15875">
-              <a:solidFill>
-                <a:schemeClr val="tx1"/>
-              </a:solidFill>
-              <a:tailEnd type="triangle"/>
-            </a:ln>
-          </p:spPr>
-          <p:style>
-            <a:lnRef idx="1">
-              <a:schemeClr val="accent1"/>
-            </a:lnRef>
-            <a:fillRef idx="0">
-              <a:schemeClr val="accent1"/>
-            </a:fillRef>
-            <a:effectRef idx="0">
-              <a:schemeClr val="accent1"/>
-            </a:effectRef>
-            <a:fontRef idx="minor">
-              <a:schemeClr val="tx1"/>
-            </a:fontRef>
-          </p:style>
-        </p:cxnSp>
-        <p:cxnSp>
-          <p:nvCxnSpPr>
-            <p:cNvPr id="55" name="Straight Arrow Connector 37">
-              <a:extLst>
-                <a:ext uri="{FF2B5EF4-FFF2-40B4-BE49-F238E27FC236}">
-                  <a16:creationId xmlns:a16="http://schemas.microsoft.com/office/drawing/2014/main" id="{7414F832-1EDF-A21D-8BE5-ED85F8CA747D}"/>
-                </a:ext>
-              </a:extLst>
-            </p:cNvPr>
-            <p:cNvCxnSpPr>
-              <a:cxnSpLocks/>
-              <a:stCxn id="13" idx="1"/>
-              <a:endCxn id="15" idx="0"/>
-            </p:cNvCxnSpPr>
-            <p:nvPr/>
-          </p:nvCxnSpPr>
-          <p:spPr>
-            <a:xfrm rot="10800000" flipV="1">
-              <a:off x="2382346" y="689799"/>
-              <a:ext cx="320039" cy="947050"/>
-            </a:xfrm>
-            <a:prstGeom prst="bentConnector2">
-              <a:avLst/>
-            </a:prstGeom>
-            <a:ln w="15875">
-              <a:solidFill>
-                <a:schemeClr val="tx1"/>
-              </a:solidFill>
-              <a:tailEnd type="triangle"/>
-            </a:ln>
-          </p:spPr>
-          <p:style>
-            <a:lnRef idx="1">
-              <a:schemeClr val="accent1"/>
-            </a:lnRef>
-            <a:fillRef idx="0">
-              <a:schemeClr val="accent1"/>
-            </a:fillRef>
-            <a:effectRef idx="0">
-              <a:schemeClr val="accent1"/>
-            </a:effectRef>
-            <a:fontRef idx="minor">
-              <a:schemeClr val="tx1"/>
-            </a:fontRef>
-          </p:style>
-        </p:cxnSp>
-        <p:cxnSp>
-          <p:nvCxnSpPr>
-            <p:cNvPr id="68" name="Straight Arrow Connector 37">
-              <a:extLst>
-                <a:ext uri="{FF2B5EF4-FFF2-40B4-BE49-F238E27FC236}">
-                  <a16:creationId xmlns:a16="http://schemas.microsoft.com/office/drawing/2014/main" id="{E469A531-9E86-3C61-B95E-79E6AF41A98C}"/>
-                </a:ext>
-              </a:extLst>
-            </p:cNvPr>
-            <p:cNvCxnSpPr>
-              <a:cxnSpLocks/>
-              <a:stCxn id="11" idx="1"/>
-              <a:endCxn id="15" idx="3"/>
-            </p:cNvCxnSpPr>
-            <p:nvPr/>
-          </p:nvCxnSpPr>
-          <p:spPr>
-            <a:xfrm flipH="1">
-              <a:off x="3113865" y="1770492"/>
-              <a:ext cx="1458658" cy="3517"/>
-            </a:xfrm>
-            <a:prstGeom prst="straightConnector1">
-              <a:avLst/>
-            </a:prstGeom>
-            <a:ln w="15875">
-              <a:solidFill>
-                <a:schemeClr val="tx1"/>
-              </a:solidFill>
-              <a:tailEnd type="triangle"/>
-            </a:ln>
-          </p:spPr>
-          <p:style>
-            <a:lnRef idx="1">
-              <a:schemeClr val="accent1"/>
-            </a:lnRef>
-            <a:fillRef idx="0">
-              <a:schemeClr val="accent1"/>
-            </a:fillRef>
-            <a:effectRef idx="0">
-              <a:schemeClr val="accent1"/>
-            </a:effectRef>
-            <a:fontRef idx="minor">
-              <a:schemeClr val="tx1"/>
-            </a:fontRef>
-          </p:style>
-        </p:cxnSp>
-        <p:cxnSp>
-          <p:nvCxnSpPr>
-            <p:cNvPr id="71" name="Straight Arrow Connector 70">
-              <a:extLst>
-                <a:ext uri="{FF2B5EF4-FFF2-40B4-BE49-F238E27FC236}">
-                  <a16:creationId xmlns:a16="http://schemas.microsoft.com/office/drawing/2014/main" id="{5D0BC433-A525-C593-0186-CCF41AAD7A36}"/>
-                </a:ext>
-              </a:extLst>
-            </p:cNvPr>
-            <p:cNvCxnSpPr>
-              <a:cxnSpLocks/>
-              <a:stCxn id="9" idx="1"/>
-              <a:endCxn id="15" idx="0"/>
-            </p:cNvCxnSpPr>
-            <p:nvPr/>
-          </p:nvCxnSpPr>
-          <p:spPr>
-            <a:xfrm rot="10800000" flipV="1">
-              <a:off x="2382345" y="1171697"/>
-              <a:ext cx="254698" cy="465152"/>
-            </a:xfrm>
-            <a:prstGeom prst="bentConnector2">
-              <a:avLst/>
-            </a:prstGeom>
-            <a:ln w="15875">
-              <a:solidFill>
-                <a:schemeClr val="tx1"/>
-              </a:solidFill>
-              <a:tailEnd type="triangle"/>
-            </a:ln>
-          </p:spPr>
-          <p:style>
-            <a:lnRef idx="1">
-              <a:schemeClr val="accent1"/>
-            </a:lnRef>
-            <a:fillRef idx="0">
-              <a:schemeClr val="accent1"/>
-            </a:fillRef>
-            <a:effectRef idx="0">
-              <a:schemeClr val="accent1"/>
-            </a:effectRef>
-            <a:fontRef idx="minor">
-              <a:schemeClr val="tx1"/>
-            </a:fontRef>
-          </p:style>
-        </p:cxnSp>
-        <p:cxnSp>
-          <p:nvCxnSpPr>
-            <p:cNvPr id="79" name="Straight Arrow Connector 78">
-              <a:extLst>
-                <a:ext uri="{FF2B5EF4-FFF2-40B4-BE49-F238E27FC236}">
-                  <a16:creationId xmlns:a16="http://schemas.microsoft.com/office/drawing/2014/main" id="{A68E7431-5D33-8301-42B4-C59433A76F64}"/>
-                </a:ext>
-              </a:extLst>
-            </p:cNvPr>
-            <p:cNvCxnSpPr>
-              <a:cxnSpLocks/>
-              <a:stCxn id="15" idx="2"/>
-              <a:endCxn id="17" idx="0"/>
-            </p:cNvCxnSpPr>
-            <p:nvPr/>
-          </p:nvCxnSpPr>
-          <p:spPr>
-            <a:xfrm>
-              <a:off x="2382345" y="1911169"/>
-              <a:ext cx="1" cy="362602"/>
-            </a:xfrm>
-            <a:prstGeom prst="straightConnector1">
-              <a:avLst/>
-            </a:prstGeom>
-            <a:ln w="15875">
-              <a:solidFill>
-                <a:schemeClr val="tx1"/>
-              </a:solidFill>
-              <a:tailEnd type="triangle"/>
-            </a:ln>
-          </p:spPr>
-          <p:style>
-            <a:lnRef idx="1">
-              <a:schemeClr val="accent1"/>
-            </a:lnRef>
-            <a:fillRef idx="0">
-              <a:schemeClr val="accent1"/>
-            </a:fillRef>
-            <a:effectRef idx="0">
-              <a:schemeClr val="accent1"/>
-            </a:effectRef>
-            <a:fontRef idx="minor">
-              <a:schemeClr val="tx1"/>
-            </a:fontRef>
-          </p:style>
-        </p:cxnSp>
-        <p:cxnSp>
-          <p:nvCxnSpPr>
-            <p:cNvPr id="86" name="Straight Arrow Connector 37">
-              <a:extLst>
-                <a:ext uri="{FF2B5EF4-FFF2-40B4-BE49-F238E27FC236}">
-                  <a16:creationId xmlns:a16="http://schemas.microsoft.com/office/drawing/2014/main" id="{7FF90D60-CE8F-01AD-126C-A4516483F897}"/>
-                </a:ext>
-              </a:extLst>
-            </p:cNvPr>
-            <p:cNvCxnSpPr>
-              <a:cxnSpLocks/>
-              <a:stCxn id="193" idx="2"/>
-              <a:endCxn id="19" idx="0"/>
-            </p:cNvCxnSpPr>
-            <p:nvPr/>
-          </p:nvCxnSpPr>
-          <p:spPr>
-            <a:xfrm rot="16200000" flipH="1">
-              <a:off x="4933326" y="2641197"/>
-              <a:ext cx="223783" cy="1"/>
-            </a:xfrm>
-            <a:prstGeom prst="bentConnector3">
-              <a:avLst>
-                <a:gd name="adj1" fmla="val 50000"/>
-              </a:avLst>
-            </a:prstGeom>
-            <a:ln w="15875">
-              <a:solidFill>
-                <a:schemeClr val="tx1"/>
-              </a:solidFill>
-              <a:tailEnd type="triangle"/>
-            </a:ln>
-          </p:spPr>
-          <p:style>
-            <a:lnRef idx="1">
-              <a:schemeClr val="accent1"/>
-            </a:lnRef>
-            <a:fillRef idx="0">
-              <a:schemeClr val="accent1"/>
-            </a:fillRef>
-            <a:effectRef idx="0">
-              <a:schemeClr val="accent1"/>
-            </a:effectRef>
-            <a:fontRef idx="minor">
-              <a:schemeClr val="tx1"/>
-            </a:fontRef>
-          </p:style>
-        </p:cxnSp>
-        <p:cxnSp>
-          <p:nvCxnSpPr>
-            <p:cNvPr id="89" name="Straight Arrow Connector 37">
-              <a:extLst>
-                <a:ext uri="{FF2B5EF4-FFF2-40B4-BE49-F238E27FC236}">
-                  <a16:creationId xmlns:a16="http://schemas.microsoft.com/office/drawing/2014/main" id="{F87C957E-CF13-FE6C-E54D-C27AA9DDFDF5}"/>
-                </a:ext>
-              </a:extLst>
-            </p:cNvPr>
-            <p:cNvCxnSpPr>
-              <a:cxnSpLocks/>
-              <a:stCxn id="191" idx="2"/>
-              <a:endCxn id="21" idx="0"/>
-            </p:cNvCxnSpPr>
-            <p:nvPr/>
-          </p:nvCxnSpPr>
-          <p:spPr>
-            <a:xfrm>
-              <a:off x="2382345" y="3153961"/>
-              <a:ext cx="0" cy="266670"/>
-            </a:xfrm>
-            <a:prstGeom prst="straightConnector1">
-              <a:avLst/>
-            </a:prstGeom>
-            <a:ln w="15875">
-              <a:solidFill>
-                <a:schemeClr val="tx1"/>
-              </a:solidFill>
-              <a:tailEnd type="triangle"/>
-            </a:ln>
-          </p:spPr>
-          <p:style>
-            <a:lnRef idx="1">
-              <a:schemeClr val="accent1"/>
-            </a:lnRef>
-            <a:fillRef idx="0">
-              <a:schemeClr val="accent1"/>
-            </a:fillRef>
-            <a:effectRef idx="0">
-              <a:schemeClr val="accent1"/>
-            </a:effectRef>
-            <a:fontRef idx="minor">
-              <a:schemeClr val="tx1"/>
-            </a:fontRef>
-          </p:style>
-        </p:cxnSp>
-        <p:cxnSp>
-          <p:nvCxnSpPr>
-            <p:cNvPr id="92" name="Straight Arrow Connector 37">
-              <a:extLst>
-                <a:ext uri="{FF2B5EF4-FFF2-40B4-BE49-F238E27FC236}">
-                  <a16:creationId xmlns:a16="http://schemas.microsoft.com/office/drawing/2014/main" id="{86562470-D5BB-6EE6-3E8B-25B629044EDF}"/>
-                </a:ext>
-              </a:extLst>
-            </p:cNvPr>
-            <p:cNvCxnSpPr>
-              <a:cxnSpLocks/>
-              <a:stCxn id="19" idx="2"/>
-              <a:endCxn id="23" idx="0"/>
-            </p:cNvCxnSpPr>
-            <p:nvPr/>
-          </p:nvCxnSpPr>
-          <p:spPr>
-            <a:xfrm rot="5400000">
-              <a:off x="4940299" y="3049042"/>
-              <a:ext cx="209838" cy="1"/>
-            </a:xfrm>
-            <a:prstGeom prst="bentConnector3">
-              <a:avLst>
-                <a:gd name="adj1" fmla="val 50000"/>
-              </a:avLst>
-            </a:prstGeom>
-            <a:ln w="15875">
-              <a:solidFill>
-                <a:schemeClr val="tx1"/>
-              </a:solidFill>
-              <a:tailEnd type="triangle"/>
-            </a:ln>
-          </p:spPr>
-          <p:style>
-            <a:lnRef idx="1">
-              <a:schemeClr val="accent1"/>
-            </a:lnRef>
-            <a:fillRef idx="0">
-              <a:schemeClr val="accent1"/>
-            </a:fillRef>
-            <a:effectRef idx="0">
-              <a:schemeClr val="accent1"/>
-            </a:effectRef>
-            <a:fontRef idx="minor">
-              <a:schemeClr val="tx1"/>
-            </a:fontRef>
-          </p:style>
-        </p:cxnSp>
-        <p:cxnSp>
-          <p:nvCxnSpPr>
-            <p:cNvPr id="93" name="Straight Arrow Connector 37">
-              <a:extLst>
-                <a:ext uri="{FF2B5EF4-FFF2-40B4-BE49-F238E27FC236}">
-                  <a16:creationId xmlns:a16="http://schemas.microsoft.com/office/drawing/2014/main" id="{3DCDEBD3-B5F0-2231-1BF2-DC423886D8F9}"/>
-                </a:ext>
-              </a:extLst>
-            </p:cNvPr>
-            <p:cNvCxnSpPr>
-              <a:cxnSpLocks/>
-              <a:stCxn id="21" idx="3"/>
-              <a:endCxn id="23" idx="1"/>
-            </p:cNvCxnSpPr>
-            <p:nvPr/>
-          </p:nvCxnSpPr>
-          <p:spPr>
-            <a:xfrm flipV="1">
-              <a:off x="3113865" y="3298742"/>
-              <a:ext cx="1382712" cy="266670"/>
-            </a:xfrm>
-            <a:prstGeom prst="bentConnector3">
-              <a:avLst>
-                <a:gd name="adj1" fmla="val 50000"/>
-              </a:avLst>
-            </a:prstGeom>
-            <a:ln w="15875">
-              <a:solidFill>
-                <a:schemeClr val="tx1"/>
-              </a:solidFill>
-              <a:tailEnd type="triangle"/>
-            </a:ln>
-          </p:spPr>
-          <p:style>
-            <a:lnRef idx="1">
-              <a:schemeClr val="accent1"/>
-            </a:lnRef>
-            <a:fillRef idx="0">
-              <a:schemeClr val="accent1"/>
-            </a:fillRef>
-            <a:effectRef idx="0">
-              <a:schemeClr val="accent1"/>
-            </a:effectRef>
-            <a:fontRef idx="minor">
-              <a:schemeClr val="tx1"/>
-            </a:fontRef>
-          </p:style>
-        </p:cxnSp>
-        <p:cxnSp>
-          <p:nvCxnSpPr>
-            <p:cNvPr id="98" name="Straight Arrow Connector 37">
-              <a:extLst>
-                <a:ext uri="{FF2B5EF4-FFF2-40B4-BE49-F238E27FC236}">
-                  <a16:creationId xmlns:a16="http://schemas.microsoft.com/office/drawing/2014/main" id="{40B315B9-0FBC-8E5A-BA18-884A04A45651}"/>
-                </a:ext>
-              </a:extLst>
-            </p:cNvPr>
-            <p:cNvCxnSpPr>
-              <a:cxnSpLocks/>
-              <a:stCxn id="23" idx="3"/>
-              <a:endCxn id="25" idx="1"/>
-            </p:cNvCxnSpPr>
-            <p:nvPr/>
-          </p:nvCxnSpPr>
-          <p:spPr>
-            <a:xfrm flipV="1">
-              <a:off x="5593857" y="2856781"/>
-              <a:ext cx="548639" cy="441961"/>
-            </a:xfrm>
-            <a:prstGeom prst="bentConnector3">
-              <a:avLst>
-                <a:gd name="adj1" fmla="val 50000"/>
-              </a:avLst>
-            </a:prstGeom>
-            <a:ln w="15875">
-              <a:solidFill>
-                <a:schemeClr val="tx1"/>
-              </a:solidFill>
-              <a:prstDash val="dash"/>
-              <a:tailEnd type="triangle"/>
-            </a:ln>
-          </p:spPr>
-          <p:style>
-            <a:lnRef idx="1">
-              <a:schemeClr val="accent1"/>
-            </a:lnRef>
-            <a:fillRef idx="0">
-              <a:schemeClr val="accent1"/>
-            </a:fillRef>
-            <a:effectRef idx="0">
-              <a:schemeClr val="accent1"/>
-            </a:effectRef>
-            <a:fontRef idx="minor">
-              <a:schemeClr val="tx1"/>
-            </a:fontRef>
-          </p:style>
-        </p:cxnSp>
-        <p:cxnSp>
-          <p:nvCxnSpPr>
-            <p:cNvPr id="101" name="Straight Arrow Connector 37">
-              <a:extLst>
-                <a:ext uri="{FF2B5EF4-FFF2-40B4-BE49-F238E27FC236}">
-                  <a16:creationId xmlns:a16="http://schemas.microsoft.com/office/drawing/2014/main" id="{3248E542-E445-FB77-FAE5-DEDA3A37412C}"/>
-                </a:ext>
-              </a:extLst>
-            </p:cNvPr>
-            <p:cNvCxnSpPr>
-              <a:cxnSpLocks/>
-              <a:stCxn id="23" idx="2"/>
-              <a:endCxn id="29" idx="0"/>
-            </p:cNvCxnSpPr>
-            <p:nvPr/>
-          </p:nvCxnSpPr>
-          <p:spPr>
-            <a:xfrm>
-              <a:off x="5045217" y="3443522"/>
-              <a:ext cx="0" cy="199443"/>
-            </a:xfrm>
-            <a:prstGeom prst="straightConnector1">
-              <a:avLst/>
-            </a:prstGeom>
-            <a:ln w="15875">
-              <a:solidFill>
-                <a:schemeClr val="tx1"/>
-              </a:solidFill>
-              <a:tailEnd type="triangle"/>
-            </a:ln>
-          </p:spPr>
-          <p:style>
-            <a:lnRef idx="1">
-              <a:schemeClr val="accent1"/>
-            </a:lnRef>
-            <a:fillRef idx="0">
-              <a:schemeClr val="accent1"/>
-            </a:fillRef>
-            <a:effectRef idx="0">
-              <a:schemeClr val="accent1"/>
-            </a:effectRef>
-            <a:fontRef idx="minor">
-              <a:schemeClr val="tx1"/>
-            </a:fontRef>
-          </p:style>
-        </p:cxnSp>
-        <p:cxnSp>
-          <p:nvCxnSpPr>
-            <p:cNvPr id="104" name="Straight Arrow Connector 37">
-              <a:extLst>
-                <a:ext uri="{FF2B5EF4-FFF2-40B4-BE49-F238E27FC236}">
-                  <a16:creationId xmlns:a16="http://schemas.microsoft.com/office/drawing/2014/main" id="{2B24668B-7AD7-D811-E92D-E111C0A65F9B}"/>
-                </a:ext>
-              </a:extLst>
-            </p:cNvPr>
-            <p:cNvCxnSpPr>
-              <a:cxnSpLocks/>
-              <a:stCxn id="25" idx="2"/>
-              <a:endCxn id="27" idx="0"/>
-            </p:cNvCxnSpPr>
-            <p:nvPr/>
-          </p:nvCxnSpPr>
-          <p:spPr>
-            <a:xfrm flipH="1">
-              <a:off x="6874015" y="2993941"/>
-              <a:ext cx="1" cy="175261"/>
-            </a:xfrm>
-            <a:prstGeom prst="straightConnector1">
-              <a:avLst/>
-            </a:prstGeom>
-            <a:ln w="15875">
-              <a:solidFill>
-                <a:schemeClr val="tx1"/>
-              </a:solidFill>
-              <a:prstDash val="dash"/>
-              <a:tailEnd type="triangle"/>
-            </a:ln>
-          </p:spPr>
-          <p:style>
-            <a:lnRef idx="1">
-              <a:schemeClr val="accent1"/>
-            </a:lnRef>
-            <a:fillRef idx="0">
-              <a:schemeClr val="accent1"/>
-            </a:fillRef>
-            <a:effectRef idx="0">
-              <a:schemeClr val="accent1"/>
-            </a:effectRef>
-            <a:fontRef idx="minor">
-              <a:schemeClr val="tx1"/>
-            </a:fontRef>
-          </p:style>
-        </p:cxnSp>
-        <p:cxnSp>
-          <p:nvCxnSpPr>
-            <p:cNvPr id="107" name="Straight Arrow Connector 37">
-              <a:extLst>
-                <a:ext uri="{FF2B5EF4-FFF2-40B4-BE49-F238E27FC236}">
-                  <a16:creationId xmlns:a16="http://schemas.microsoft.com/office/drawing/2014/main" id="{8ED00ED2-297A-0432-1548-FCAA7691C137}"/>
-                </a:ext>
-              </a:extLst>
-            </p:cNvPr>
-            <p:cNvCxnSpPr>
-              <a:cxnSpLocks/>
-              <a:stCxn id="29" idx="2"/>
-              <a:endCxn id="31" idx="0"/>
-            </p:cNvCxnSpPr>
-            <p:nvPr/>
-          </p:nvCxnSpPr>
-          <p:spPr>
-            <a:xfrm>
-              <a:off x="5045217" y="3932526"/>
-              <a:ext cx="0" cy="199443"/>
-            </a:xfrm>
-            <a:prstGeom prst="straightConnector1">
-              <a:avLst/>
-            </a:prstGeom>
-            <a:ln w="15875">
-              <a:solidFill>
-                <a:schemeClr val="tx1"/>
-              </a:solidFill>
-              <a:tailEnd type="triangle"/>
-            </a:ln>
-          </p:spPr>
-          <p:style>
-            <a:lnRef idx="1">
-              <a:schemeClr val="accent1"/>
-            </a:lnRef>
-            <a:fillRef idx="0">
-              <a:schemeClr val="accent1"/>
-            </a:fillRef>
-            <a:effectRef idx="0">
-              <a:schemeClr val="accent1"/>
-            </a:effectRef>
-            <a:fontRef idx="minor">
-              <a:schemeClr val="tx1"/>
-            </a:fontRef>
-          </p:style>
-        </p:cxnSp>
-        <p:sp>
-          <p:nvSpPr>
-            <p:cNvPr id="187" name="Rectangle 186">
-              <a:extLst>
-                <a:ext uri="{FF2B5EF4-FFF2-40B4-BE49-F238E27FC236}">
-                  <a16:creationId xmlns:a16="http://schemas.microsoft.com/office/drawing/2014/main" id="{9B723779-DEA5-DD79-92F9-7CB081A499F1}"/>
-                </a:ext>
-              </a:extLst>
-            </p:cNvPr>
-            <p:cNvSpPr/>
-            <p:nvPr/>
-          </p:nvSpPr>
-          <p:spPr>
-            <a:xfrm>
-              <a:off x="3296745" y="2901868"/>
-              <a:ext cx="731520" cy="191033"/>
-            </a:xfrm>
-            <a:prstGeom prst="rect">
-              <a:avLst/>
-            </a:prstGeom>
-            <a:noFill/>
-            <a:ln w="12700">
-              <a:solidFill>
-                <a:schemeClr val="tx1"/>
-              </a:solidFill>
-              <a:prstDash val="dash"/>
-            </a:ln>
-          </p:spPr>
-          <p:style>
-            <a:lnRef idx="2">
-              <a:schemeClr val="accent6"/>
-            </a:lnRef>
-            <a:fillRef idx="1">
-              <a:schemeClr val="lt1"/>
-            </a:fillRef>
-            <a:effectRef idx="0">
-              <a:schemeClr val="accent6"/>
-            </a:effectRef>
-            <a:fontRef idx="minor">
-              <a:schemeClr val="dk1"/>
-            </a:fontRef>
-          </p:style>
-          <p:txBody>
-            <a:bodyPr rtlCol="0" anchor="ctr"/>
-            <a:lstStyle/>
-            <a:p>
-              <a:pPr algn="ctr"/>
-              <a:r>
-                <a:rPr lang="en-US" sz="900" dirty="0"/>
-                <a:t>Raw Data</a:t>
-              </a:r>
-              <a:endParaRPr lang="en-US" sz="900" dirty="0">
-                <a:cs typeface="Times New Roman" panose="02020603050405020304" pitchFamily="18" charset="0"/>
-              </a:endParaRPr>
-            </a:p>
-          </p:txBody>
-        </p:sp>
-        <p:sp>
-          <p:nvSpPr>
-            <p:cNvPr id="191" name="Rectangle 190">
-              <a:extLst>
-                <a:ext uri="{FF2B5EF4-FFF2-40B4-BE49-F238E27FC236}">
-                  <a16:creationId xmlns:a16="http://schemas.microsoft.com/office/drawing/2014/main" id="{E97679C3-9B21-3698-260D-94C8AA313870}"/>
-                </a:ext>
-              </a:extLst>
-            </p:cNvPr>
-            <p:cNvSpPr/>
-            <p:nvPr/>
-          </p:nvSpPr>
-          <p:spPr>
-            <a:xfrm>
-              <a:off x="1833705" y="2833921"/>
-              <a:ext cx="1097280" cy="320040"/>
-            </a:xfrm>
-            <a:prstGeom prst="rect">
-              <a:avLst/>
-            </a:prstGeom>
-            <a:noFill/>
-            <a:ln w="12700">
-              <a:solidFill>
-                <a:schemeClr val="tx1"/>
-              </a:solidFill>
-            </a:ln>
-          </p:spPr>
-          <p:style>
-            <a:lnRef idx="2">
-              <a:schemeClr val="accent6"/>
-            </a:lnRef>
-            <a:fillRef idx="1">
-              <a:schemeClr val="lt1"/>
-            </a:fillRef>
-            <a:effectRef idx="0">
-              <a:schemeClr val="accent6"/>
-            </a:effectRef>
-            <a:fontRef idx="minor">
-              <a:schemeClr val="dk1"/>
-            </a:fontRef>
-          </p:style>
-          <p:txBody>
-            <a:bodyPr rtlCol="0" anchor="ctr"/>
-            <a:lstStyle/>
-            <a:p>
-              <a:pPr algn="ctr"/>
-              <a:r>
-                <a:rPr lang="en-US" sz="900" b="1" i="1" dirty="0">
-                  <a:cs typeface="Times New Roman" panose="02020603050405020304" pitchFamily="18" charset="0"/>
-                </a:rPr>
-                <a:t>Predictors</a:t>
-              </a:r>
-            </a:p>
-            <a:p>
-              <a:pPr algn="ctr"/>
-              <a:r>
-                <a:rPr lang="en-US" sz="900" dirty="0" err="1"/>
-                <a:t>Tmax</a:t>
-              </a:r>
-              <a:r>
-                <a:rPr lang="en-US" sz="900" dirty="0"/>
-                <a:t> | </a:t>
-              </a:r>
-              <a:r>
-                <a:rPr lang="en-US" sz="900" dirty="0" err="1"/>
-                <a:t>Tmin</a:t>
-              </a:r>
-              <a:r>
-                <a:rPr lang="en-US" sz="900" dirty="0"/>
-                <a:t> | </a:t>
-              </a:r>
-              <a:r>
-                <a:rPr lang="en-US" sz="900" dirty="0" err="1"/>
-                <a:t>Prcp</a:t>
-              </a:r>
-              <a:endParaRPr lang="en-US" sz="900" dirty="0">
-                <a:cs typeface="Times New Roman" panose="02020603050405020304" pitchFamily="18" charset="0"/>
-              </a:endParaRPr>
-            </a:p>
-          </p:txBody>
-        </p:sp>
-        <p:sp>
-          <p:nvSpPr>
-            <p:cNvPr id="193" name="Rectangle 192">
-              <a:extLst>
-                <a:ext uri="{FF2B5EF4-FFF2-40B4-BE49-F238E27FC236}">
-                  <a16:creationId xmlns:a16="http://schemas.microsoft.com/office/drawing/2014/main" id="{6D400CB4-40FB-BB5C-2195-776869EF1934}"/>
-                </a:ext>
-              </a:extLst>
-            </p:cNvPr>
-            <p:cNvSpPr/>
-            <p:nvPr/>
-          </p:nvSpPr>
-          <p:spPr>
-            <a:xfrm>
-              <a:off x="4313697" y="2209267"/>
-              <a:ext cx="1463040" cy="320040"/>
-            </a:xfrm>
-            <a:prstGeom prst="rect">
-              <a:avLst/>
-            </a:prstGeom>
-            <a:noFill/>
-            <a:ln w="12700">
-              <a:solidFill>
-                <a:schemeClr val="tx1"/>
-              </a:solidFill>
-            </a:ln>
-          </p:spPr>
-          <p:style>
-            <a:lnRef idx="2">
-              <a:schemeClr val="accent6"/>
-            </a:lnRef>
-            <a:fillRef idx="1">
-              <a:schemeClr val="lt1"/>
-            </a:fillRef>
-            <a:effectRef idx="0">
-              <a:schemeClr val="accent6"/>
-            </a:effectRef>
-            <a:fontRef idx="minor">
-              <a:schemeClr val="dk1"/>
-            </a:fontRef>
-          </p:style>
-          <p:txBody>
-            <a:bodyPr rtlCol="0" anchor="ctr"/>
-            <a:lstStyle/>
-            <a:p>
-              <a:pPr algn="ctr"/>
-              <a:r>
-                <a:rPr lang="en-US" sz="900" b="1" i="1" dirty="0"/>
-                <a:t>Target</a:t>
-              </a:r>
-            </a:p>
-            <a:p>
-              <a:pPr algn="ctr"/>
-              <a:r>
-                <a:rPr lang="en-US" sz="900" dirty="0"/>
-                <a:t>Niño 1+2, Niño 3, Niño 3.4</a:t>
-              </a:r>
-              <a:endParaRPr lang="en-US" sz="900" dirty="0">
-                <a:cs typeface="Times New Roman" panose="02020603050405020304" pitchFamily="18" charset="0"/>
-              </a:endParaRPr>
-            </a:p>
-          </p:txBody>
-        </p:sp>
-        <p:cxnSp>
-          <p:nvCxnSpPr>
-            <p:cNvPr id="222" name="Straight Arrow Connector 37">
-              <a:extLst>
-                <a:ext uri="{FF2B5EF4-FFF2-40B4-BE49-F238E27FC236}">
-                  <a16:creationId xmlns:a16="http://schemas.microsoft.com/office/drawing/2014/main" id="{11F10232-7A3B-8D82-CB43-12930911E447}"/>
-                </a:ext>
-              </a:extLst>
-            </p:cNvPr>
-            <p:cNvCxnSpPr>
-              <a:cxnSpLocks/>
-              <a:stCxn id="191" idx="3"/>
-              <a:endCxn id="187" idx="1"/>
-            </p:cNvCxnSpPr>
-            <p:nvPr/>
-          </p:nvCxnSpPr>
-          <p:spPr>
-            <a:xfrm>
-              <a:off x="2930985" y="2993941"/>
-              <a:ext cx="365760" cy="3444"/>
-            </a:xfrm>
-            <a:prstGeom prst="straightConnector1">
-              <a:avLst/>
-            </a:prstGeom>
-            <a:ln w="15875">
-              <a:solidFill>
-                <a:schemeClr val="tx1"/>
-              </a:solidFill>
-              <a:prstDash val="dash"/>
-              <a:tailEnd type="triangle"/>
-            </a:ln>
-          </p:spPr>
-          <p:style>
-            <a:lnRef idx="1">
-              <a:schemeClr val="accent1"/>
-            </a:lnRef>
-            <a:fillRef idx="0">
-              <a:schemeClr val="accent1"/>
-            </a:fillRef>
-            <a:effectRef idx="0">
-              <a:schemeClr val="accent1"/>
-            </a:effectRef>
-            <a:fontRef idx="minor">
-              <a:schemeClr val="tx1"/>
-            </a:fontRef>
-          </p:style>
-        </p:cxnSp>
-        <p:cxnSp>
-          <p:nvCxnSpPr>
-            <p:cNvPr id="242" name="Straight Arrow Connector 37">
-              <a:extLst>
-                <a:ext uri="{FF2B5EF4-FFF2-40B4-BE49-F238E27FC236}">
-                  <a16:creationId xmlns:a16="http://schemas.microsoft.com/office/drawing/2014/main" id="{7616D1C6-0445-E16B-52FA-D3FB401CC7F7}"/>
-                </a:ext>
-              </a:extLst>
-            </p:cNvPr>
-            <p:cNvCxnSpPr>
-              <a:cxnSpLocks/>
-              <a:stCxn id="187" idx="3"/>
-              <a:endCxn id="23" idx="1"/>
-            </p:cNvCxnSpPr>
-            <p:nvPr/>
-          </p:nvCxnSpPr>
-          <p:spPr>
-            <a:xfrm>
-              <a:off x="4028265" y="2997385"/>
-              <a:ext cx="468312" cy="301357"/>
-            </a:xfrm>
-            <a:prstGeom prst="bentConnector3">
-              <a:avLst>
-                <a:gd name="adj1" fmla="val 50000"/>
-              </a:avLst>
-            </a:prstGeom>
-            <a:ln w="15875">
-              <a:solidFill>
-                <a:schemeClr val="tx1"/>
-              </a:solidFill>
-              <a:prstDash val="dash"/>
-              <a:tailEnd type="triangle"/>
-            </a:ln>
-          </p:spPr>
-          <p:style>
-            <a:lnRef idx="1">
-              <a:schemeClr val="accent1"/>
-            </a:lnRef>
-            <a:fillRef idx="0">
-              <a:schemeClr val="accent1"/>
-            </a:fillRef>
-            <a:effectRef idx="0">
-              <a:schemeClr val="accent1"/>
-            </a:effectRef>
-            <a:fontRef idx="minor">
-              <a:schemeClr val="tx1"/>
-            </a:fontRef>
-          </p:style>
-        </p:cxnSp>
-        <p:cxnSp>
-          <p:nvCxnSpPr>
-            <p:cNvPr id="246" name="Straight Arrow Connector 245">
-              <a:extLst>
-                <a:ext uri="{FF2B5EF4-FFF2-40B4-BE49-F238E27FC236}">
-                  <a16:creationId xmlns:a16="http://schemas.microsoft.com/office/drawing/2014/main" id="{59351D93-07AF-8D08-59B8-AEB20F452FD3}"/>
-                </a:ext>
-              </a:extLst>
-            </p:cNvPr>
-            <p:cNvCxnSpPr>
-              <a:cxnSpLocks/>
-              <a:stCxn id="17" idx="2"/>
-              <a:endCxn id="191" idx="0"/>
-            </p:cNvCxnSpPr>
-            <p:nvPr/>
-          </p:nvCxnSpPr>
-          <p:spPr>
-            <a:xfrm rot="5400000">
-              <a:off x="2197788" y="2649362"/>
-              <a:ext cx="369117" cy="1"/>
-            </a:xfrm>
-            <a:prstGeom prst="bentConnector3">
-              <a:avLst>
-                <a:gd name="adj1" fmla="val 50000"/>
-              </a:avLst>
-            </a:prstGeom>
-            <a:ln w="15875">
-              <a:solidFill>
-                <a:schemeClr val="tx1"/>
-              </a:solidFill>
-              <a:tailEnd type="triangle"/>
-            </a:ln>
-          </p:spPr>
-          <p:style>
-            <a:lnRef idx="1">
-              <a:schemeClr val="accent1"/>
-            </a:lnRef>
-            <a:fillRef idx="0">
-              <a:schemeClr val="accent1"/>
-            </a:fillRef>
-            <a:effectRef idx="0">
-              <a:schemeClr val="accent1"/>
-            </a:effectRef>
-            <a:fontRef idx="minor">
-              <a:schemeClr val="tx1"/>
-            </a:fontRef>
-          </p:style>
-        </p:cxnSp>
-        <p:cxnSp>
-          <p:nvCxnSpPr>
-            <p:cNvPr id="249" name="Straight Arrow Connector 248">
-              <a:extLst>
-                <a:ext uri="{FF2B5EF4-FFF2-40B4-BE49-F238E27FC236}">
-                  <a16:creationId xmlns:a16="http://schemas.microsoft.com/office/drawing/2014/main" id="{4D543120-C962-70AD-DDB7-2B155C81457D}"/>
-                </a:ext>
-              </a:extLst>
-            </p:cNvPr>
-            <p:cNvCxnSpPr>
-              <a:cxnSpLocks/>
-              <a:stCxn id="17" idx="3"/>
-              <a:endCxn id="193" idx="1"/>
-            </p:cNvCxnSpPr>
-            <p:nvPr/>
-          </p:nvCxnSpPr>
-          <p:spPr>
-            <a:xfrm flipV="1">
-              <a:off x="3107805" y="2369287"/>
-              <a:ext cx="1205892" cy="1"/>
-            </a:xfrm>
-            <a:prstGeom prst="straightConnector1">
-              <a:avLst/>
-            </a:prstGeom>
-            <a:ln w="15875">
-              <a:solidFill>
-                <a:schemeClr val="tx1"/>
-              </a:solidFill>
-              <a:tailEnd type="triangle"/>
-            </a:ln>
-          </p:spPr>
-          <p:style>
-            <a:lnRef idx="1">
-              <a:schemeClr val="accent1"/>
-            </a:lnRef>
-            <a:fillRef idx="0">
-              <a:schemeClr val="accent1"/>
-            </a:fillRef>
-            <a:effectRef idx="0">
-              <a:schemeClr val="accent1"/>
-            </a:effectRef>
-            <a:fontRef idx="minor">
-              <a:schemeClr val="tx1"/>
-            </a:fontRef>
-          </p:style>
-        </p:cxnSp>
-      </p:grpSp>
-    </p:spTree>
-    <p:extLst>
-      <p:ext uri="{BB962C8B-B14F-4D97-AF65-F5344CB8AC3E}">
-        <p14:creationId xmlns:p14="http://schemas.microsoft.com/office/powerpoint/2010/main" val="2844256019"/>
-      </p:ext>
-    </p:extLst>
-  </p:cSld>
-  <p:clrMapOvr>
-    <a:masterClrMapping/>
-  </p:clrMapOvr>
-</p:sld>
-</file>
-
-<file path=ppt/slides/slide3.xml><?xml version="1.0" encoding="utf-8"?>
 <p:sld xmlns:a="http://schemas.openxmlformats.org/drawingml/2006/main" xmlns:r="http://schemas.openxmlformats.org/officeDocument/2006/relationships" xmlns:p="http://schemas.openxmlformats.org/presentationml/2006/main">
   <p:cSld>
     <p:spTree>
